--- a/slide/MeetU_pitch.pptx
+++ b/slide/MeetU_pitch.pptx
@@ -523,7 +523,7 @@
           <a:p>
             <a:r>
               <a:rPr lang="en-US" dirty="0"/>
-              <a:t>MeetU は、推し活グッズの【譲】と【求】をタグでつなぎ、1対1で組めない交換も3〜4人の輪にして、受け渡しの移動距離が最短になる組み合わせを提案するサービスです。</a:t>
+              <a:t>MeetU は、技術書の【譲】と【求】をタグでつなぎ、1対1で組めない交換も3〜4人の輪にして、受け渡しの移動距離が最短になる組み合わせを提案するサービスです。</a:t>
             </a:r>
             <a:endParaRPr lang="en-US" dirty="0"/>
           </a:p>
@@ -611,7 +611,7 @@
           <a:p>
             <a:r>
               <a:rPr lang="en-US" dirty="0"/>
-              <a:t>『五条』で検索しても『五条悟』のカードが出る。埋め込むのはカードではなくタグなので、カードが増えてもベクトル数は語彙数で頭打ちになります。マッチングの判定そのものはタグ一致のままで、ベクトルは名寄せにだけ使います。</a:t>
+              <a:t>『リーダブル』で検索しても『リーダブルコード』のカードが出る。埋め込むのはカードではなくタグなので、カードが増えてもベクトル数は語彙数で頭打ちになります。マッチングの判定そのものはタグ一致のままで、ベクトルは名寄せにだけ使います。</a:t>
             </a:r>
             <a:endParaRPr lang="en-US" dirty="0"/>
           </a:p>
@@ -699,7 +699,7 @@
           <a:p>
             <a:r>
               <a:rPr lang="en-US" dirty="0"/>
-              <a:t>汎用のフリマや SNS 投稿は手軽ですが、推し活のタグ構造も、3人以上の交換も扱えません。MeetU は推し活特化で、しかも登録するだけの手軽さを両立します。</a:t>
+              <a:t>汎用のフリマや SNS 投稿は手軽ですが、技術書のタグ構造も、3人以上の交換も扱えません。MeetU は技術書特化で、しかも登録するだけの手軽さを両立します。</a:t>
             </a:r>
             <a:endParaRPr lang="en-US" dirty="0"/>
           </a:p>
@@ -787,7 +787,7 @@
           <a:p>
             <a:r>
               <a:rPr lang="en-US" dirty="0"/>
-              <a:t>私たちが目指すのは、交換が“噛み合わない”で終わらず、手放したグッズがちゃんと次の人に届く世界です。</a:t>
+              <a:t>私たちが目指すのは、交換が“噛み合わない”で終わらず、読み終えた技術書がちゃんと次の人に届く世界です。</a:t>
             </a:r>
             <a:endParaRPr lang="en-US" dirty="0"/>
           </a:p>
@@ -1403,7 +1403,7 @@
           <a:p>
             <a:r>
               <a:rPr lang="en-US" dirty="0"/>
-              <a:t>ユーザーにとっては手放したものが届く安心、コミュニティにとっては交換が会場の外でも回り続ける基盤を目指します。</a:t>
+              <a:t>ユーザーにとっては読み終えた本が次に届く安心、エンジニアのコミュニティにとっては交換が勉強会の外でも回り続ける基盤を目指します。</a:t>
             </a:r>
             <a:endParaRPr lang="en-US" dirty="0"/>
           </a:p>
@@ -1491,7 +1491,7 @@
           <a:p>
             <a:r>
               <a:rPr lang="en-US" dirty="0"/>
-              <a:t>推し活のグッズ交換は、SNSの譲渡投稿を目で追うのが主流です。見つからない、噛み合わない、1対1では成立しない、の3つで止まります。</a:t>
+              <a:t>技術書の交換は、SNSの譲渡投稿を目で追うのが主流です。見つからない、噛み合わない、1対1では成立しない、の3つで止まります。</a:t>
             </a:r>
             <a:endParaRPr lang="en-US" dirty="0"/>
           </a:p>
@@ -1579,7 +1579,7 @@
           <a:p>
             <a:r>
               <a:rPr lang="en-US" dirty="0"/>
-              <a:t>最終的には、推し活の【譲】と【求】がすべて MeetU の上でつながる、交換のインフラになることを目指します。</a:t>
+              <a:t>最終的には、技術書の【譲】と【求】がすべて MeetU の上でつながる、交換のインフラになることを目指します。</a:t>
             </a:r>
             <a:endParaRPr lang="en-US" dirty="0"/>
           </a:p>
@@ -2371,7 +2371,7 @@
           <a:p>
             <a:r>
               <a:rPr lang="en-US" dirty="0"/>
-              <a:t>タグの品質がマッチングの精度を決めます。だから入力を人に頼らず、写真からビジョンLLMでタグ候補を出します。カテゴリはJSONで制約し、最終確定はユーザーが行います。</a:t>
+              <a:t>タグの品質がマッチングの精度を決めます。だから入力を人に頼らず、表紙の写真からビジョンLLMで書名・著者・出版社・分野のタグ候補を出します。カテゴリはJSONで制約し、最終確定はユーザーが行います。</a:t>
             </a:r>
             <a:endParaRPr lang="en-US" dirty="0"/>
           </a:p>
@@ -2823,7 +2823,7 @@
       </p:sp>
       <p:pic>
         <p:nvPicPr>
-          <p:cNvPr id="5" name="Image 0" descr="C:/Users/user/otaku-match/frontend/public/logo.png">    </p:cNvPr>
+          <p:cNvPr id="5" name="Image 0" descr="C:/Users/user/otaku-match/frontend/public/logo2.png">    </p:cNvPr>
           <p:cNvPicPr>
             <a:picLocks noChangeAspect="1"/>
           </p:cNvPicPr>
@@ -2986,7 +2986,7 @@
                 <a:ea typeface="Yu Gothic" pitchFamily="34" charset="-122"/>
                 <a:cs typeface="Yu Gothic" pitchFamily="34" charset="-120"/>
               </a:rPr>
-              <a:t>推し活のグッズ交換を、</a:t>
+              <a:t>積ん読と探している本を、</a:t>
             </a:r>
             <a:pPr indent="0" marL="0">
               <a:buNone/>
@@ -3014,7 +3014,7 @@
                 <a:ea typeface="Yu Gothic" pitchFamily="34" charset="-122"/>
                 <a:cs typeface="Yu Gothic" pitchFamily="34" charset="-120"/>
               </a:rPr>
-              <a:t>とつなぐマッチング</a:t>
+              <a:t>とつなぐ</a:t>
             </a:r>
             <a:endParaRPr lang="en-US" sz="1300" dirty="0"/>
           </a:p>
@@ -3845,7 +3845,7 @@
         <p:spPr>
           <a:xfrm>
             <a:off x="6199632" y="3300984"/>
-            <a:ext cx="658368" cy="237744"/>
+            <a:ext cx="566928" cy="237744"/>
           </a:xfrm>
           <a:prstGeom prst="roundRect">
             <a:avLst>
@@ -3872,7 +3872,7 @@
         <p:spPr>
           <a:xfrm>
             <a:off x="6199632" y="3300984"/>
-            <a:ext cx="658368" cy="237744"/>
+            <a:ext cx="566928" cy="237744"/>
           </a:xfrm>
           <a:prstGeom prst="rect">
             <a:avLst/>
@@ -3896,7 +3896,7 @@
                 <a:ea typeface="Yu Gothic" pitchFamily="34" charset="-122"/>
                 <a:cs typeface="Yu Gothic" pitchFamily="34" charset="-120"/>
               </a:rPr>
-              <a:t>プロセカ</a:t>
+              <a:t>Rust</a:t>
             </a:r>
             <a:endParaRPr lang="en-US" sz="800" dirty="0"/>
           </a:p>
@@ -3910,8 +3910,8 @@
         </p:nvSpPr>
         <p:spPr>
           <a:xfrm>
-            <a:off x="6931152" y="3300984"/>
-            <a:ext cx="566928" cy="237744"/>
+            <a:off x="6839712" y="3300984"/>
+            <a:ext cx="786384" cy="237744"/>
           </a:xfrm>
           <a:prstGeom prst="roundRect">
             <a:avLst>
@@ -3937,8 +3937,8 @@
         </p:nvSpPr>
         <p:spPr>
           <a:xfrm>
-            <a:off x="6931152" y="3300984"/>
-            <a:ext cx="566928" cy="237744"/>
+            <a:off x="6839712" y="3300984"/>
+            <a:ext cx="786384" cy="237744"/>
           </a:xfrm>
           <a:prstGeom prst="rect">
             <a:avLst/>
@@ -3962,7 +3962,7 @@
                 <a:ea typeface="Yu Gothic" pitchFamily="34" charset="-122"/>
                 <a:cs typeface="Yu Gothic" pitchFamily="34" charset="-120"/>
               </a:rPr>
-              <a:t>天馬司</a:t>
+              <a:t>オライリー</a:t>
             </a:r>
             <a:endParaRPr lang="en-US" sz="800" dirty="0"/>
           </a:p>
@@ -4107,7 +4107,7 @@
       </p:sp>
       <p:pic>
         <p:nvPicPr>
-          <p:cNvPr id="3" name="Image 0" descr="C:/Users/user/otaku-match/frontend/public/logo.png">    </p:cNvPr>
+          <p:cNvPr id="3" name="Image 0" descr="C:/Users/user/otaku-match/frontend/public/logo2.png">    </p:cNvPr>
           <p:cNvPicPr>
             <a:picLocks noChangeAspect="1"/>
           </p:cNvPicPr>
@@ -4214,7 +4214,7 @@
                 <a:ea typeface="Yu Gothic" pitchFamily="34" charset="-122"/>
                 <a:cs typeface="Yu Gothic" pitchFamily="34" charset="-120"/>
               </a:rPr>
-              <a:t>同じグッズ</a:t>
+              <a:t>同じ本</a:t>
             </a:r>
             <a:pPr algn="ctr" indent="0" marL="0">
               <a:buNone/>
@@ -4360,7 +4360,7 @@
                 <a:ea typeface="Yu Gothic" pitchFamily="34" charset="-122"/>
                 <a:cs typeface="Yu Gothic" pitchFamily="34" charset="-120"/>
               </a:rPr>
-              <a:t>五条</a:t>
+              <a:t>リーダブル</a:t>
             </a:r>
             <a:endParaRPr lang="en-US" sz="1000" dirty="0"/>
           </a:p>
@@ -4450,7 +4450,7 @@
                 <a:ea typeface="Yu Gothic" pitchFamily="34" charset="-122"/>
                 <a:cs typeface="Yu Gothic" pitchFamily="34" charset="-120"/>
               </a:rPr>
-              <a:t>五条悟</a:t>
+              <a:t>リーダブルコード</a:t>
             </a:r>
             <a:endParaRPr lang="en-US" sz="1000" dirty="0"/>
           </a:p>
@@ -4516,7 +4516,7 @@
                 <a:ea typeface="Yu Gothic" pitchFamily="34" charset="-122"/>
                 <a:cs typeface="Yu Gothic" pitchFamily="34" charset="-120"/>
               </a:rPr>
-              <a:t>アクスタ</a:t>
+              <a:t>オライリー</a:t>
             </a:r>
             <a:endParaRPr lang="en-US" sz="1000" dirty="0"/>
           </a:p>
@@ -4606,7 +4606,7 @@
                 <a:ea typeface="Yu Gothic" pitchFamily="34" charset="-122"/>
                 <a:cs typeface="Yu Gothic" pitchFamily="34" charset="-120"/>
               </a:rPr>
-              <a:t>アクリルスタンド</a:t>
+              <a:t>O'Reilly</a:t>
             </a:r>
             <a:endParaRPr lang="en-US" sz="1000" dirty="0"/>
           </a:p>
@@ -4672,7 +4672,7 @@
                 <a:ea typeface="Yu Gothic" pitchFamily="34" charset="-122"/>
                 <a:cs typeface="Yu Gothic" pitchFamily="34" charset="-120"/>
               </a:rPr>
-              <a:t>ごじょう</a:t>
+              <a:t>達人</a:t>
             </a:r>
             <a:endParaRPr lang="en-US" sz="1000" dirty="0"/>
           </a:p>
@@ -4762,7 +4762,7 @@
                 <a:ea typeface="Yu Gothic" pitchFamily="34" charset="-122"/>
                 <a:cs typeface="Yu Gothic" pitchFamily="34" charset="-120"/>
               </a:rPr>
-              <a:t>五条悟</a:t>
+              <a:t>達人プログラマー</a:t>
             </a:r>
             <a:endParaRPr lang="en-US" sz="1000" dirty="0"/>
           </a:p>
@@ -5079,7 +5079,7 @@
                 <a:ea typeface="Yu Gothic" pitchFamily="34" charset="-122"/>
                 <a:cs typeface="Yu Gothic" pitchFamily="34" charset="-120"/>
               </a:rPr>
-              <a:t>五条 アクスタ</a:t>
+              <a:t>リーダブル 入門</a:t>
             </a:r>
             <a:endParaRPr lang="en-US" sz="900" dirty="0"/>
           </a:p>
@@ -5199,7 +5199,7 @@
         <p:spPr>
           <a:xfrm>
             <a:off x="6473952" y="2615184"/>
-            <a:ext cx="388620" cy="237744"/>
+            <a:ext cx="822960" cy="237744"/>
           </a:xfrm>
           <a:prstGeom prst="roundRect">
             <a:avLst>
@@ -5226,7 +5226,7 @@
         <p:spPr>
           <a:xfrm>
             <a:off x="6473952" y="2615184"/>
-            <a:ext cx="388620" cy="237744"/>
+            <a:ext cx="822960" cy="237744"/>
           </a:xfrm>
           <a:prstGeom prst="rect">
             <a:avLst/>
@@ -5250,7 +5250,7 @@
                 <a:ea typeface="Yu Gothic" pitchFamily="34" charset="-122"/>
                 <a:cs typeface="Yu Gothic" pitchFamily="34" charset="-120"/>
               </a:rPr>
-              <a:t>五条悟</a:t>
+              <a:t>リーダブルコード</a:t>
             </a:r>
             <a:endParaRPr lang="en-US" sz="700" dirty="0"/>
           </a:p>
@@ -5264,8 +5264,8 @@
         </p:nvSpPr>
         <p:spPr>
           <a:xfrm>
-            <a:off x="6908292" y="2615184"/>
-            <a:ext cx="822960" cy="237744"/>
+            <a:off x="7342632" y="2615184"/>
+            <a:ext cx="301752" cy="237744"/>
           </a:xfrm>
           <a:prstGeom prst="roundRect">
             <a:avLst>
@@ -5291,8 +5291,8 @@
         </p:nvSpPr>
         <p:spPr>
           <a:xfrm>
-            <a:off x="6908292" y="2615184"/>
-            <a:ext cx="822960" cy="237744"/>
+            <a:off x="7342632" y="2615184"/>
+            <a:ext cx="301752" cy="237744"/>
           </a:xfrm>
           <a:prstGeom prst="rect">
             <a:avLst/>
@@ -5316,7 +5316,7 @@
                 <a:ea typeface="Yu Gothic" pitchFamily="34" charset="-122"/>
                 <a:cs typeface="Yu Gothic" pitchFamily="34" charset="-120"/>
               </a:rPr>
-              <a:t>アクリルスタンド</a:t>
+              <a:t>入門</a:t>
             </a:r>
             <a:endParaRPr lang="en-US" sz="700" dirty="0"/>
           </a:p>
@@ -5397,7 +5397,7 @@
         <p:spPr>
           <a:xfrm>
             <a:off x="6473952" y="3483864"/>
-            <a:ext cx="388620" cy="237744"/>
+            <a:ext cx="562356" cy="237744"/>
           </a:xfrm>
           <a:prstGeom prst="roundRect">
             <a:avLst>
@@ -5424,7 +5424,7 @@
         <p:spPr>
           <a:xfrm>
             <a:off x="6473952" y="3483864"/>
-            <a:ext cx="388620" cy="237744"/>
+            <a:ext cx="562356" cy="237744"/>
           </a:xfrm>
           <a:prstGeom prst="rect">
             <a:avLst/>
@@ -5448,7 +5448,7 @@
                 <a:ea typeface="Yu Gothic" pitchFamily="34" charset="-122"/>
                 <a:cs typeface="Yu Gothic" pitchFamily="34" charset="-120"/>
               </a:rPr>
-              <a:t>五条悟</a:t>
+              <a:t>リーダブル</a:t>
             </a:r>
             <a:endParaRPr lang="en-US" sz="700" dirty="0"/>
           </a:p>
@@ -5462,8 +5462,8 @@
         </p:nvSpPr>
         <p:spPr>
           <a:xfrm>
-            <a:off x="6908292" y="3483864"/>
-            <a:ext cx="475488" cy="237744"/>
+            <a:off x="7082028" y="3483864"/>
+            <a:ext cx="388620" cy="237744"/>
           </a:xfrm>
           <a:prstGeom prst="roundRect">
             <a:avLst>
@@ -5489,8 +5489,8 @@
         </p:nvSpPr>
         <p:spPr>
           <a:xfrm>
-            <a:off x="6908292" y="3483864"/>
-            <a:ext cx="475488" cy="237744"/>
+            <a:off x="7082028" y="3483864"/>
+            <a:ext cx="388620" cy="237744"/>
           </a:xfrm>
           <a:prstGeom prst="rect">
             <a:avLst/>
@@ -5514,7 +5514,7 @@
                 <a:ea typeface="Yu Gothic" pitchFamily="34" charset="-122"/>
                 <a:cs typeface="Yu Gothic" pitchFamily="34" charset="-120"/>
               </a:rPr>
-              <a:t>アクスタ</a:t>
+              <a:t>入門書</a:t>
             </a:r>
             <a:endParaRPr lang="en-US" sz="700" dirty="0"/>
           </a:p>
@@ -5553,7 +5553,7 @@
                 <a:ea typeface="Yu Gothic" pitchFamily="34" charset="-122"/>
                 <a:cs typeface="Yu Gothic" pitchFamily="34" charset="-120"/>
               </a:rPr>
-              <a:t>表記がちがっても同じグッズとして表示</a:t>
+              <a:t>表記がちがっても同じ本として表示</a:t>
             </a:r>
             <a:endParaRPr lang="en-US" sz="700" dirty="0"/>
           </a:p>
@@ -5632,7 +5632,7 @@
       </p:sp>
       <p:pic>
         <p:nvPicPr>
-          <p:cNvPr id="3" name="Image 0" descr="C:/Users/user/otaku-match/frontend/public/logo.png">    </p:cNvPr>
+          <p:cNvPr id="3" name="Image 0" descr="C:/Users/user/otaku-match/frontend/public/logo2.png">    </p:cNvPr>
           <p:cNvPicPr>
             <a:picLocks noChangeAspect="1"/>
           </p:cNvPicPr>
@@ -5973,7 +5973,7 @@
                 <a:ea typeface="Yu Gothic" pitchFamily="34" charset="-122"/>
                 <a:cs typeface="Yu Gothic" pitchFamily="34" charset="-120"/>
               </a:rPr>
-              <a:t>推し活特化型</a:t>
+              <a:t>技術書特化型</a:t>
             </a:r>
             <a:endParaRPr lang="en-US" sz="1100" dirty="0"/>
           </a:p>
@@ -6171,7 +6171,7 @@
                 <a:ea typeface="Yu Gothic" pitchFamily="34" charset="-122"/>
                 <a:cs typeface="Yu Gothic" pitchFamily="34" charset="-120"/>
               </a:rPr>
-              <a:t>交換掲示板</a:t>
+              <a:t>技術書の古書店</a:t>
             </a:r>
             <a:endParaRPr lang="en-US" sz="1000" dirty="0"/>
           </a:p>
@@ -6206,7 +6206,7 @@
       </p:sp>
       <p:pic>
         <p:nvPicPr>
-          <p:cNvPr id="19" name="Image 1" descr="C:/Users/user/otaku-match/frontend/public/logo.png">    </p:cNvPr>
+          <p:cNvPr id="19" name="Image 1" descr="C:/Users/user/otaku-match/frontend/public/logo2.png">    </p:cNvPr>
           <p:cNvPicPr>
             <a:picLocks noChangeAspect="1"/>
           </p:cNvPicPr>
@@ -6339,7 +6339,7 @@
       </p:sp>
       <p:pic>
         <p:nvPicPr>
-          <p:cNvPr id="3" name="Image 0" descr="C:/Users/user/otaku-match/frontend/public/logo.png">    </p:cNvPr>
+          <p:cNvPr id="3" name="Image 0" descr="C:/Users/user/otaku-match/frontend/public/logo2.png">    </p:cNvPr>
           <p:cNvPicPr>
             <a:picLocks noChangeAspect="1"/>
           </p:cNvPicPr>
@@ -6515,7 +6515,7 @@
                 <a:ea typeface="Yu Gothic" pitchFamily="34" charset="-122"/>
                 <a:cs typeface="Yu Gothic" pitchFamily="34" charset="-120"/>
               </a:rPr>
-              <a:t>推しのグッズが</a:t>
+              <a:t>読み終えた技術書が</a:t>
             </a:r>
             <a:pPr algn="ctr" indent="0" marL="0">
               <a:buNone/>
@@ -6622,7 +6622,7 @@
       </p:sp>
       <p:pic>
         <p:nvPicPr>
-          <p:cNvPr id="3" name="Image 0" descr="C:/Users/user/otaku-match/frontend/public/logo.png">    </p:cNvPr>
+          <p:cNvPr id="3" name="Image 0" descr="C:/Users/user/otaku-match/frontend/public/logo2.png">    </p:cNvPr>
           <p:cNvPicPr>
             <a:picLocks noChangeAspect="1"/>
           </p:cNvPicPr>
@@ -7544,7 +7544,7 @@
       </p:sp>
       <p:pic>
         <p:nvPicPr>
-          <p:cNvPr id="3" name="Image 0" descr="C:/Users/user/otaku-match/frontend/public/logo.png">    </p:cNvPr>
+          <p:cNvPr id="3" name="Image 0" descr="C:/Users/user/otaku-match/frontend/public/logo2.png">    </p:cNvPr>
           <p:cNvPicPr>
             <a:picLocks noChangeAspect="1"/>
           </p:cNvPicPr>
@@ -8256,7 +8256,7 @@
                 <a:ea typeface="Yu Gothic" pitchFamily="34" charset="-122"/>
                 <a:cs typeface="Yu Gothic" pitchFamily="34" charset="-120"/>
               </a:rPr>
-              <a:t>アクスタの写真</a:t>
+              <a:t>本の表紙の写真</a:t>
             </a:r>
             <a:endParaRPr lang="en-US" sz="900" dirty="0"/>
           </a:p>
@@ -8376,7 +8376,7 @@
         <p:spPr>
           <a:xfrm>
             <a:off x="6839712" y="3694176"/>
-            <a:ext cx="658368" cy="237744"/>
+            <a:ext cx="566928" cy="237744"/>
           </a:xfrm>
           <a:prstGeom prst="roundRect">
             <a:avLst>
@@ -8403,7 +8403,7 @@
         <p:spPr>
           <a:xfrm>
             <a:off x="6839712" y="3694176"/>
-            <a:ext cx="658368" cy="237744"/>
+            <a:ext cx="566928" cy="237744"/>
           </a:xfrm>
           <a:prstGeom prst="rect">
             <a:avLst/>
@@ -8427,7 +8427,7 @@
                 <a:ea typeface="Yu Gothic" pitchFamily="34" charset="-122"/>
                 <a:cs typeface="Yu Gothic" pitchFamily="34" charset="-120"/>
               </a:rPr>
-              <a:t>プロセカ</a:t>
+              <a:t>Rust</a:t>
             </a:r>
             <a:endParaRPr lang="en-US" sz="800" dirty="0"/>
           </a:p>
@@ -8441,8 +8441,8 @@
         </p:nvSpPr>
         <p:spPr>
           <a:xfrm>
-            <a:off x="7571232" y="3694176"/>
-            <a:ext cx="566928" cy="237744"/>
+            <a:off x="7479792" y="3694176"/>
+            <a:ext cx="786384" cy="237744"/>
           </a:xfrm>
           <a:prstGeom prst="roundRect">
             <a:avLst>
@@ -8468,8 +8468,8 @@
         </p:nvSpPr>
         <p:spPr>
           <a:xfrm>
-            <a:off x="7571232" y="3694176"/>
-            <a:ext cx="566928" cy="237744"/>
+            <a:off x="7479792" y="3694176"/>
+            <a:ext cx="786384" cy="237744"/>
           </a:xfrm>
           <a:prstGeom prst="rect">
             <a:avLst/>
@@ -8493,7 +8493,7 @@
                 <a:ea typeface="Yu Gothic" pitchFamily="34" charset="-122"/>
                 <a:cs typeface="Yu Gothic" pitchFamily="34" charset="-120"/>
               </a:rPr>
-              <a:t>天馬司</a:t>
+              <a:t>オライリー</a:t>
             </a:r>
             <a:endParaRPr lang="en-US" sz="800" dirty="0"/>
           </a:p>
@@ -8559,7 +8559,7 @@
                 <a:ea typeface="Yu Gothic" pitchFamily="34" charset="-122"/>
                 <a:cs typeface="Yu Gothic" pitchFamily="34" charset="-120"/>
               </a:rPr>
-              <a:t>アクスタ</a:t>
+              <a:t>入門書</a:t>
             </a:r>
             <a:endParaRPr lang="en-US" sz="800" dirty="0"/>
           </a:p>
@@ -8704,7 +8704,7 @@
       </p:sp>
       <p:pic>
         <p:nvPicPr>
-          <p:cNvPr id="3" name="Image 0" descr="C:/Users/user/otaku-match/frontend/public/logo.png">    </p:cNvPr>
+          <p:cNvPr id="3" name="Image 0" descr="C:/Users/user/otaku-match/frontend/public/logo2.png">    </p:cNvPr>
           <p:cNvPicPr>
             <a:picLocks noChangeAspect="1"/>
           </p:cNvPicPr>
@@ -9322,7 +9322,7 @@
       </p:sp>
       <p:pic>
         <p:nvPicPr>
-          <p:cNvPr id="3" name="Image 0" descr="C:/Users/user/otaku-match/frontend/public/logo.png">    </p:cNvPr>
+          <p:cNvPr id="3" name="Image 0" descr="C:/Users/user/otaku-match/frontend/public/logo2.png">    </p:cNvPr>
           <p:cNvPicPr>
             <a:picLocks noChangeAspect="1"/>
           </p:cNvPicPr>
@@ -10600,7 +10600,7 @@
       </p:sp>
       <p:pic>
         <p:nvPicPr>
-          <p:cNvPr id="3" name="Image 0" descr="C:/Users/user/otaku-match/frontend/public/logo.png">    </p:cNvPr>
+          <p:cNvPr id="3" name="Image 0" descr="C:/Users/user/otaku-match/frontend/public/logo2.png">    </p:cNvPr>
           <p:cNvPicPr>
             <a:picLocks noChangeAspect="1"/>
           </p:cNvPicPr>
@@ -11537,7 +11537,7 @@
       </p:sp>
       <p:pic>
         <p:nvPicPr>
-          <p:cNvPr id="3" name="Image 0" descr="C:/Users/user/otaku-match/frontend/public/logo.png">    </p:cNvPr>
+          <p:cNvPr id="3" name="Image 0" descr="C:/Users/user/otaku-match/frontend/public/logo2.png">    </p:cNvPr>
           <p:cNvPicPr>
             <a:picLocks noChangeAspect="1"/>
           </p:cNvPicPr>
@@ -12618,7 +12618,7 @@
       </p:sp>
       <p:pic>
         <p:nvPicPr>
-          <p:cNvPr id="3" name="Image 0" descr="C:/Users/user/otaku-match/frontend/public/logo.png">    </p:cNvPr>
+          <p:cNvPr id="3" name="Image 0" descr="C:/Users/user/otaku-match/frontend/public/logo2.png">    </p:cNvPr>
           <p:cNvPicPr>
             <a:picLocks noChangeAspect="1"/>
           </p:cNvPicPr>
@@ -12750,7 +12750,7 @@
                 <a:ea typeface="Yu Gothic" pitchFamily="34" charset="-122"/>
                 <a:cs typeface="Yu Gothic" pitchFamily="34" charset="-120"/>
               </a:rPr>
-              <a:t>推し活の</a:t>
+              <a:t>技術書の</a:t>
             </a:r>
             <a:pPr algn="ctr" indent="0" marL="0">
               <a:buNone/>
@@ -12932,7 +12932,7 @@
                 <a:ea typeface="Yu Gothic" pitchFamily="34" charset="-122"/>
                 <a:cs typeface="Yu Gothic" pitchFamily="34" charset="-120"/>
               </a:rPr>
-              <a:t>手放したグッズが、次の推しの人へ届く</a:t>
+              <a:t>読み終えた本が、次に必要な人へ届く</a:t>
             </a:r>
             <a:endParaRPr lang="en-US" sz="1200" dirty="0"/>
           </a:p>
@@ -13086,7 +13086,7 @@
                 <a:ea typeface="Yu Gothic" pitchFamily="34" charset="-122"/>
                 <a:cs typeface="Yu Gothic" pitchFamily="34" charset="-120"/>
               </a:rPr>
-              <a:t>イベント会場の外でも、交換の輪が回り続ける</a:t>
+              <a:t>勉強会や技術書典の外でも、交換の輪が回り続ける</a:t>
             </a:r>
             <a:endParaRPr lang="en-US" sz="1200" dirty="0"/>
           </a:p>
@@ -13157,7 +13157,7 @@
                 <a:ea typeface="Yu Gothic" pitchFamily="34" charset="-122"/>
                 <a:cs typeface="Yu Gothic" pitchFamily="34" charset="-120"/>
               </a:rPr>
-              <a:t>推し活グッズ交換の課題</a:t>
+              <a:t>技術書交換の課題</a:t>
             </a:r>
             <a:endParaRPr lang="en-US" sz="900" dirty="0"/>
           </a:p>
@@ -13165,7 +13165,7 @@
       </p:sp>
       <p:pic>
         <p:nvPicPr>
-          <p:cNvPr id="3" name="Image 0" descr="C:/Users/user/otaku-match/frontend/public/logo.png">    </p:cNvPr>
+          <p:cNvPr id="3" name="Image 0" descr="C:/Users/user/otaku-match/frontend/public/logo2.png">    </p:cNvPr>
           <p:cNvPicPr>
             <a:picLocks noChangeAspect="1"/>
           </p:cNvPicPr>
@@ -13258,7 +13258,7 @@
                 <a:ea typeface="Yu Gothic" pitchFamily="34" charset="-122"/>
                 <a:cs typeface="Yu Gothic" pitchFamily="34" charset="-120"/>
               </a:rPr>
-              <a:t>推し活のグッズ交換、</a:t>
+              <a:t>技術書の交換、</a:t>
             </a:r>
             <a:pPr algn="ctr" indent="0" marL="0">
               <a:buNone/>
@@ -13620,7 +13620,7 @@
                 <a:ea typeface="Yu Gothic" pitchFamily="34" charset="-122"/>
                 <a:cs typeface="Yu Gothic" pitchFamily="34" charset="-120"/>
               </a:rPr>
-              <a:t>見つけても、持っているグッズが</a:t>
+              <a:t>見つけても、持っている本が</a:t>
             </a:r>
             <a:endParaRPr lang="en-US" sz="1200" dirty="0"/>
           </a:p>
@@ -13640,7 +13640,7 @@
                 <a:ea typeface="Yu Gothic" pitchFamily="34" charset="-122"/>
                 <a:cs typeface="Yu Gothic" pitchFamily="34" charset="-120"/>
               </a:rPr>
-              <a:t>合わず振り出しに戻る…</a:t>
+              <a:t>噛み合わず振り出しに戻る…</a:t>
             </a:r>
             <a:endParaRPr lang="en-US" sz="1200" dirty="0"/>
           </a:p>
@@ -13896,7 +13896,7 @@
       </p:sp>
       <p:pic>
         <p:nvPicPr>
-          <p:cNvPr id="3" name="Image 0" descr="C:/Users/user/otaku-match/frontend/public/logo.png">    </p:cNvPr>
+          <p:cNvPr id="3" name="Image 0" descr="C:/Users/user/otaku-match/frontend/public/logo2.png">    </p:cNvPr>
           <p:cNvPicPr>
             <a:picLocks noChangeAspect="1"/>
           </p:cNvPicPr>
@@ -14094,7 +14094,7 @@
                 <a:ea typeface="Yu Gothic" pitchFamily="34" charset="-122"/>
                 <a:cs typeface="Yu Gothic" pitchFamily="34" charset="-120"/>
               </a:rPr>
-              <a:t>推し活の</a:t>
+              <a:t>技術書の</a:t>
             </a:r>
             <a:pPr algn="ctr" indent="0" marL="0">
               <a:buNone/>
@@ -14187,7 +14187,7 @@
       </p:sp>
       <p:pic>
         <p:nvPicPr>
-          <p:cNvPr id="3" name="Image 0" descr="C:/Users/user/otaku-match/frontend/public/logo.png">    </p:cNvPr>
+          <p:cNvPr id="3" name="Image 0" descr="C:/Users/user/otaku-match/frontend/public/logo2.png">    </p:cNvPr>
           <p:cNvPicPr>
             <a:picLocks noChangeAspect="1"/>
           </p:cNvPicPr>
@@ -14965,7 +14965,7 @@
       </p:sp>
       <p:pic>
         <p:nvPicPr>
-          <p:cNvPr id="5" name="Image 0" descr="C:/Users/user/otaku-match/frontend/public/logo.png">    </p:cNvPr>
+          <p:cNvPr id="5" name="Image 0" descr="C:/Users/user/otaku-match/frontend/public/logo2.png">    </p:cNvPr>
           <p:cNvPicPr>
             <a:picLocks noChangeAspect="1"/>
           </p:cNvPicPr>
@@ -15128,7 +15128,7 @@
                 <a:ea typeface="Yu Gothic" pitchFamily="34" charset="-122"/>
                 <a:cs typeface="Yu Gothic" pitchFamily="34" charset="-120"/>
               </a:rPr>
-              <a:t>推し活のグッズ交換を、</a:t>
+              <a:t>積ん読と探している本を、</a:t>
             </a:r>
             <a:pPr indent="0" marL="0">
               <a:buNone/>
@@ -15156,7 +15156,7 @@
                 <a:ea typeface="Yu Gothic" pitchFamily="34" charset="-122"/>
                 <a:cs typeface="Yu Gothic" pitchFamily="34" charset="-120"/>
               </a:rPr>
-              <a:t>とつなぐマッチング</a:t>
+              <a:t>とつなぐ</a:t>
             </a:r>
             <a:endParaRPr lang="en-US" sz="1300" dirty="0"/>
           </a:p>
@@ -15987,7 +15987,7 @@
         <p:spPr>
           <a:xfrm>
             <a:off x="6199632" y="3300984"/>
-            <a:ext cx="658368" cy="237744"/>
+            <a:ext cx="566928" cy="237744"/>
           </a:xfrm>
           <a:prstGeom prst="roundRect">
             <a:avLst>
@@ -16014,7 +16014,7 @@
         <p:spPr>
           <a:xfrm>
             <a:off x="6199632" y="3300984"/>
-            <a:ext cx="658368" cy="237744"/>
+            <a:ext cx="566928" cy="237744"/>
           </a:xfrm>
           <a:prstGeom prst="rect">
             <a:avLst/>
@@ -16038,7 +16038,7 @@
                 <a:ea typeface="Yu Gothic" pitchFamily="34" charset="-122"/>
                 <a:cs typeface="Yu Gothic" pitchFamily="34" charset="-120"/>
               </a:rPr>
-              <a:t>プロセカ</a:t>
+              <a:t>Rust</a:t>
             </a:r>
             <a:endParaRPr lang="en-US" sz="800" dirty="0"/>
           </a:p>
@@ -16052,8 +16052,8 @@
         </p:nvSpPr>
         <p:spPr>
           <a:xfrm>
-            <a:off x="6931152" y="3300984"/>
-            <a:ext cx="566928" cy="237744"/>
+            <a:off x="6839712" y="3300984"/>
+            <a:ext cx="786384" cy="237744"/>
           </a:xfrm>
           <a:prstGeom prst="roundRect">
             <a:avLst>
@@ -16079,8 +16079,8 @@
         </p:nvSpPr>
         <p:spPr>
           <a:xfrm>
-            <a:off x="6931152" y="3300984"/>
-            <a:ext cx="566928" cy="237744"/>
+            <a:off x="6839712" y="3300984"/>
+            <a:ext cx="786384" cy="237744"/>
           </a:xfrm>
           <a:prstGeom prst="rect">
             <a:avLst/>
@@ -16104,7 +16104,7 @@
                 <a:ea typeface="Yu Gothic" pitchFamily="34" charset="-122"/>
                 <a:cs typeface="Yu Gothic" pitchFamily="34" charset="-120"/>
               </a:rPr>
-              <a:t>天馬司</a:t>
+              <a:t>オライリー</a:t>
             </a:r>
             <a:endParaRPr lang="en-US" sz="800" dirty="0"/>
           </a:p>
@@ -16241,7 +16241,7 @@
                 <a:ea typeface="Yu Gothic" pitchFamily="34" charset="-122"/>
                 <a:cs typeface="Yu Gothic" pitchFamily="34" charset="-120"/>
               </a:rPr>
-              <a:t>推し活グッズ交換の課題</a:t>
+              <a:t>技術書交換の課題</a:t>
             </a:r>
             <a:endParaRPr lang="en-US" sz="900" dirty="0"/>
           </a:p>
@@ -16249,7 +16249,7 @@
       </p:sp>
       <p:pic>
         <p:nvPicPr>
-          <p:cNvPr id="3" name="Image 0" descr="C:/Users/user/otaku-match/frontend/public/logo.png">    </p:cNvPr>
+          <p:cNvPr id="3" name="Image 0" descr="C:/Users/user/otaku-match/frontend/public/logo2.png">    </p:cNvPr>
           <p:cNvPicPr>
             <a:picLocks noChangeAspect="1"/>
           </p:cNvPicPr>
@@ -16342,7 +16342,7 @@
                 <a:ea typeface="Yu Gothic" pitchFamily="34" charset="-122"/>
                 <a:cs typeface="Yu Gothic" pitchFamily="34" charset="-120"/>
               </a:rPr>
-              <a:t>推し活のグッズ交換、</a:t>
+              <a:t>技術書の交換、</a:t>
             </a:r>
             <a:pPr algn="ctr" indent="0" marL="0">
               <a:buNone/>
@@ -16704,7 +16704,7 @@
                 <a:ea typeface="Yu Gothic" pitchFamily="34" charset="-122"/>
                 <a:cs typeface="Yu Gothic" pitchFamily="34" charset="-120"/>
               </a:rPr>
-              <a:t>見つけても、持っているグッズが</a:t>
+              <a:t>見つけても、持っている本が</a:t>
             </a:r>
             <a:endParaRPr lang="en-US" sz="1200" dirty="0"/>
           </a:p>
@@ -16724,7 +16724,7 @@
                 <a:ea typeface="Yu Gothic" pitchFamily="34" charset="-122"/>
                 <a:cs typeface="Yu Gothic" pitchFamily="34" charset="-120"/>
               </a:rPr>
-              <a:t>合わず振り出しに戻る…</a:t>
+              <a:t>噛み合わず振り出しに戻る…</a:t>
             </a:r>
             <a:endParaRPr lang="en-US" sz="1200" dirty="0"/>
           </a:p>
@@ -17145,7 +17145,7 @@
       </p:sp>
       <p:pic>
         <p:nvPicPr>
-          <p:cNvPr id="5" name="Image 0" descr="C:/Users/user/otaku-match/frontend/public/logo.png">    </p:cNvPr>
+          <p:cNvPr id="5" name="Image 0" descr="C:/Users/user/otaku-match/frontend/public/logo2.png">    </p:cNvPr>
           <p:cNvPicPr>
             <a:picLocks noChangeAspect="1"/>
           </p:cNvPicPr>
@@ -17308,7 +17308,7 @@
                 <a:ea typeface="Yu Gothic" pitchFamily="34" charset="-122"/>
                 <a:cs typeface="Yu Gothic" pitchFamily="34" charset="-120"/>
               </a:rPr>
-              <a:t>推し活のグッズ交換を、</a:t>
+              <a:t>積ん読と探している本を、</a:t>
             </a:r>
             <a:pPr indent="0" marL="0">
               <a:buNone/>
@@ -17336,7 +17336,7 @@
                 <a:ea typeface="Yu Gothic" pitchFamily="34" charset="-122"/>
                 <a:cs typeface="Yu Gothic" pitchFamily="34" charset="-120"/>
               </a:rPr>
-              <a:t>とつなぐマッチング</a:t>
+              <a:t>とつなぐ</a:t>
             </a:r>
             <a:endParaRPr lang="en-US" sz="1300" dirty="0"/>
           </a:p>
@@ -18167,7 +18167,7 @@
         <p:spPr>
           <a:xfrm>
             <a:off x="6199632" y="3300984"/>
-            <a:ext cx="658368" cy="237744"/>
+            <a:ext cx="566928" cy="237744"/>
           </a:xfrm>
           <a:prstGeom prst="roundRect">
             <a:avLst>
@@ -18194,7 +18194,7 @@
         <p:spPr>
           <a:xfrm>
             <a:off x="6199632" y="3300984"/>
-            <a:ext cx="658368" cy="237744"/>
+            <a:ext cx="566928" cy="237744"/>
           </a:xfrm>
           <a:prstGeom prst="rect">
             <a:avLst/>
@@ -18218,7 +18218,7 @@
                 <a:ea typeface="Yu Gothic" pitchFamily="34" charset="-122"/>
                 <a:cs typeface="Yu Gothic" pitchFamily="34" charset="-120"/>
               </a:rPr>
-              <a:t>プロセカ</a:t>
+              <a:t>Rust</a:t>
             </a:r>
             <a:endParaRPr lang="en-US" sz="800" dirty="0"/>
           </a:p>
@@ -18232,8 +18232,8 @@
         </p:nvSpPr>
         <p:spPr>
           <a:xfrm>
-            <a:off x="6931152" y="3300984"/>
-            <a:ext cx="566928" cy="237744"/>
+            <a:off x="6839712" y="3300984"/>
+            <a:ext cx="786384" cy="237744"/>
           </a:xfrm>
           <a:prstGeom prst="roundRect">
             <a:avLst>
@@ -18259,8 +18259,8 @@
         </p:nvSpPr>
         <p:spPr>
           <a:xfrm>
-            <a:off x="6931152" y="3300984"/>
-            <a:ext cx="566928" cy="237744"/>
+            <a:off x="6839712" y="3300984"/>
+            <a:ext cx="786384" cy="237744"/>
           </a:xfrm>
           <a:prstGeom prst="rect">
             <a:avLst/>
@@ -18284,7 +18284,7 @@
                 <a:ea typeface="Yu Gothic" pitchFamily="34" charset="-122"/>
                 <a:cs typeface="Yu Gothic" pitchFamily="34" charset="-120"/>
               </a:rPr>
-              <a:t>天馬司</a:t>
+              <a:t>オライリー</a:t>
             </a:r>
             <a:endParaRPr lang="en-US" sz="800" dirty="0"/>
           </a:p>
@@ -18429,7 +18429,7 @@
       </p:sp>
       <p:pic>
         <p:nvPicPr>
-          <p:cNvPr id="3" name="Image 0" descr="C:/Users/user/otaku-match/frontend/public/logo.png">    </p:cNvPr>
+          <p:cNvPr id="3" name="Image 0" descr="C:/Users/user/otaku-match/frontend/public/logo2.png">    </p:cNvPr>
           <p:cNvPicPr>
             <a:picLocks noChangeAspect="1"/>
           </p:cNvPicPr>
@@ -19273,7 +19273,7 @@
                 <a:ea typeface="Yu Gothic" pitchFamily="34" charset="-122"/>
                 <a:cs typeface="Yu Gothic" pitchFamily="34" charset="-120"/>
               </a:rPr>
-              <a:t>プロセカ</a:t>
+              <a:t>Rust</a:t>
             </a:r>
             <a:endParaRPr lang="en-US" sz="700" dirty="0"/>
           </a:p>
@@ -19288,7 +19288,7 @@
         <p:spPr>
           <a:xfrm>
             <a:off x="6995160" y="1911096"/>
-            <a:ext cx="388620" cy="237744"/>
+            <a:ext cx="562356" cy="237744"/>
           </a:xfrm>
           <a:prstGeom prst="roundRect">
             <a:avLst>
@@ -19315,7 +19315,7 @@
         <p:spPr>
           <a:xfrm>
             <a:off x="6995160" y="1911096"/>
-            <a:ext cx="388620" cy="237744"/>
+            <a:ext cx="562356" cy="237744"/>
           </a:xfrm>
           <a:prstGeom prst="rect">
             <a:avLst/>
@@ -19339,7 +19339,7 @@
                 <a:ea typeface="Yu Gothic" pitchFamily="34" charset="-122"/>
                 <a:cs typeface="Yu Gothic" pitchFamily="34" charset="-120"/>
               </a:rPr>
-              <a:t>天馬司</a:t>
+              <a:t>オライリー</a:t>
             </a:r>
             <a:endParaRPr lang="en-US" sz="700" dirty="0"/>
           </a:p>
@@ -19353,8 +19353,8 @@
         </p:nvSpPr>
         <p:spPr>
           <a:xfrm>
-            <a:off x="7429500" y="1911096"/>
-            <a:ext cx="475488" cy="237744"/>
+            <a:off x="7603236" y="1911096"/>
+            <a:ext cx="388620" cy="237744"/>
           </a:xfrm>
           <a:prstGeom prst="roundRect">
             <a:avLst>
@@ -19380,8 +19380,8 @@
         </p:nvSpPr>
         <p:spPr>
           <a:xfrm>
-            <a:off x="7429500" y="1911096"/>
-            <a:ext cx="475488" cy="237744"/>
+            <a:off x="7603236" y="1911096"/>
+            <a:ext cx="388620" cy="237744"/>
           </a:xfrm>
           <a:prstGeom prst="rect">
             <a:avLst/>
@@ -19405,7 +19405,7 @@
                 <a:ea typeface="Yu Gothic" pitchFamily="34" charset="-122"/>
                 <a:cs typeface="Yu Gothic" pitchFamily="34" charset="-120"/>
               </a:rPr>
-              <a:t>アクスタ</a:t>
+              <a:t>入門書</a:t>
             </a:r>
             <a:endParaRPr lang="en-US" sz="700" dirty="0"/>
           </a:p>
@@ -19537,7 +19537,7 @@
                 <a:ea typeface="Yu Gothic" pitchFamily="34" charset="-122"/>
                 <a:cs typeface="Yu Gothic" pitchFamily="34" charset="-120"/>
               </a:rPr>
-              <a:t>プロセカ</a:t>
+              <a:t>Rust</a:t>
             </a:r>
             <a:endParaRPr lang="en-US" sz="700" dirty="0"/>
           </a:p>
@@ -19552,7 +19552,7 @@
         <p:spPr>
           <a:xfrm>
             <a:off x="6995160" y="2752344"/>
-            <a:ext cx="388620" cy="237744"/>
+            <a:ext cx="562356" cy="237744"/>
           </a:xfrm>
           <a:prstGeom prst="roundRect">
             <a:avLst>
@@ -19579,7 +19579,7 @@
         <p:spPr>
           <a:xfrm>
             <a:off x="6995160" y="2752344"/>
-            <a:ext cx="388620" cy="237744"/>
+            <a:ext cx="562356" cy="237744"/>
           </a:xfrm>
           <a:prstGeom prst="rect">
             <a:avLst/>
@@ -19603,7 +19603,7 @@
                 <a:ea typeface="Yu Gothic" pitchFamily="34" charset="-122"/>
                 <a:cs typeface="Yu Gothic" pitchFamily="34" charset="-120"/>
               </a:rPr>
-              <a:t>天馬司</a:t>
+              <a:t>オライリー</a:t>
             </a:r>
             <a:endParaRPr lang="en-US" sz="700" dirty="0"/>
           </a:p>
@@ -19617,8 +19617,8 @@
         </p:nvSpPr>
         <p:spPr>
           <a:xfrm>
-            <a:off x="7429500" y="2752344"/>
-            <a:ext cx="475488" cy="237744"/>
+            <a:off x="7603236" y="2752344"/>
+            <a:ext cx="388620" cy="237744"/>
           </a:xfrm>
           <a:prstGeom prst="roundRect">
             <a:avLst>
@@ -19644,8 +19644,8 @@
         </p:nvSpPr>
         <p:spPr>
           <a:xfrm>
-            <a:off x="7429500" y="2752344"/>
-            <a:ext cx="475488" cy="237744"/>
+            <a:off x="7603236" y="2752344"/>
+            <a:ext cx="388620" cy="237744"/>
           </a:xfrm>
           <a:prstGeom prst="rect">
             <a:avLst/>
@@ -19669,7 +19669,7 @@
                 <a:ea typeface="Yu Gothic" pitchFamily="34" charset="-122"/>
                 <a:cs typeface="Yu Gothic" pitchFamily="34" charset="-120"/>
               </a:rPr>
-              <a:t>缶バッジ</a:t>
+              <a:t>逆引き</a:t>
             </a:r>
             <a:endParaRPr lang="en-US" sz="700" dirty="0"/>
           </a:p>
@@ -19750,7 +19750,7 @@
         <p:spPr>
           <a:xfrm>
             <a:off x="6473952" y="3593592"/>
-            <a:ext cx="475488" cy="237744"/>
+            <a:ext cx="301752" cy="237744"/>
           </a:xfrm>
           <a:prstGeom prst="roundRect">
             <a:avLst>
@@ -19777,7 +19777,7 @@
         <p:spPr>
           <a:xfrm>
             <a:off x="6473952" y="3593592"/>
-            <a:ext cx="475488" cy="237744"/>
+            <a:ext cx="301752" cy="237744"/>
           </a:xfrm>
           <a:prstGeom prst="rect">
             <a:avLst/>
@@ -19801,7 +19801,7 @@
                 <a:ea typeface="Yu Gothic" pitchFamily="34" charset="-122"/>
                 <a:cs typeface="Yu Gothic" pitchFamily="34" charset="-120"/>
               </a:rPr>
-              <a:t>呪術廻戦</a:t>
+              <a:t>Go</a:t>
             </a:r>
             <a:endParaRPr lang="en-US" sz="700" dirty="0"/>
           </a:p>
@@ -19815,8 +19815,8 @@
         </p:nvSpPr>
         <p:spPr>
           <a:xfrm>
-            <a:off x="6995160" y="3593592"/>
-            <a:ext cx="388620" cy="237744"/>
+            <a:off x="6821424" y="3593592"/>
+            <a:ext cx="562356" cy="237744"/>
           </a:xfrm>
           <a:prstGeom prst="roundRect">
             <a:avLst>
@@ -19842,8 +19842,8 @@
         </p:nvSpPr>
         <p:spPr>
           <a:xfrm>
-            <a:off x="6995160" y="3593592"/>
-            <a:ext cx="388620" cy="237744"/>
+            <a:off x="6821424" y="3593592"/>
+            <a:ext cx="562356" cy="237744"/>
           </a:xfrm>
           <a:prstGeom prst="rect">
             <a:avLst/>
@@ -19867,7 +19867,7 @@
                 <a:ea typeface="Yu Gothic" pitchFamily="34" charset="-122"/>
                 <a:cs typeface="Yu Gothic" pitchFamily="34" charset="-120"/>
               </a:rPr>
-              <a:t>五条悟</a:t>
+              <a:t>達人出版会</a:t>
             </a:r>
             <a:endParaRPr lang="en-US" sz="700" dirty="0"/>
           </a:p>
@@ -19933,7 +19933,7 @@
                 <a:ea typeface="Yu Gothic" pitchFamily="34" charset="-122"/>
                 <a:cs typeface="Yu Gothic" pitchFamily="34" charset="-120"/>
               </a:rPr>
-              <a:t>ぬい</a:t>
+              <a:t>設計</a:t>
             </a:r>
             <a:endParaRPr lang="en-US" sz="700" dirty="0"/>
           </a:p>
@@ -20012,7 +20012,7 @@
       </p:sp>
       <p:pic>
         <p:nvPicPr>
-          <p:cNvPr id="3" name="Image 0" descr="C:/Users/user/otaku-match/frontend/public/logo.png">    </p:cNvPr>
+          <p:cNvPr id="3" name="Image 0" descr="C:/Users/user/otaku-match/frontend/public/logo2.png">    </p:cNvPr>
           <p:cNvPicPr>
             <a:picLocks noChangeAspect="1"/>
           </p:cNvPicPr>
@@ -20985,7 +20985,7 @@
       </p:sp>
       <p:pic>
         <p:nvPicPr>
-          <p:cNvPr id="3" name="Image 0" descr="C:/Users/user/otaku-match/frontend/public/logo.png">    </p:cNvPr>
+          <p:cNvPr id="3" name="Image 0" descr="C:/Users/user/otaku-match/frontend/public/logo2.png">    </p:cNvPr>
           <p:cNvPicPr>
             <a:picLocks noChangeAspect="1"/>
           </p:cNvPicPr>
@@ -22705,7 +22705,7 @@
       </p:sp>
       <p:pic>
         <p:nvPicPr>
-          <p:cNvPr id="3" name="Image 0" descr="C:/Users/user/otaku-match/frontend/public/logo.png">    </p:cNvPr>
+          <p:cNvPr id="3" name="Image 0" descr="C:/Users/user/otaku-match/frontend/public/logo2.png">    </p:cNvPr>
           <p:cNvPicPr>
             <a:picLocks noChangeAspect="1"/>
           </p:cNvPicPr>
@@ -23124,7 +23124,7 @@
                 <a:ea typeface="Yu Gothic" pitchFamily="34" charset="-122"/>
                 <a:cs typeface="Yu Gothic" pitchFamily="34" charset="-120"/>
               </a:rPr>
-              <a:t>【譲】天馬司 缶バッジ</a:t>
+              <a:t>【譲】リーダブルコード</a:t>
             </a:r>
             <a:endParaRPr lang="en-US" sz="800" dirty="0"/>
           </a:p>
@@ -23144,7 +23144,7 @@
                 <a:ea typeface="Yu Gothic" pitchFamily="34" charset="-122"/>
                 <a:cs typeface="Yu Gothic" pitchFamily="34" charset="-120"/>
               </a:rPr>
-              <a:t>【求】草薙寧々 アクスタ</a:t>
+              <a:t>【求】達人プログラマー</a:t>
             </a:r>
             <a:endParaRPr lang="en-US" sz="800" dirty="0"/>
           </a:p>
@@ -23211,7 +23211,7 @@
                 <a:ea typeface="Yu Gothic" pitchFamily="34" charset="-122"/>
                 <a:cs typeface="Yu Gothic" pitchFamily="34" charset="-120"/>
               </a:rPr>
-              <a:t>【求】五条 アクスタ</a:t>
+              <a:t>【求】Rust 入門書</a:t>
             </a:r>
             <a:endParaRPr lang="en-US" sz="800" dirty="0"/>
           </a:p>
@@ -23231,7 +23231,7 @@
                 <a:ea typeface="Yu Gothic" pitchFamily="34" charset="-122"/>
                 <a:cs typeface="Yu Gothic" pitchFamily="34" charset="-120"/>
               </a:rPr>
-              <a:t>【譲】夏油 ぬい</a:t>
+              <a:t>【譲】Go 設計本</a:t>
             </a:r>
             <a:endParaRPr lang="en-US" sz="800" dirty="0"/>
           </a:p>
@@ -23298,7 +23298,7 @@
                 <a:ea typeface="Yu Gothic" pitchFamily="34" charset="-122"/>
                 <a:cs typeface="Yu Gothic" pitchFamily="34" charset="-120"/>
               </a:rPr>
-              <a:t>【譲】ランダム缶 5種</a:t>
+              <a:t>【譲】技術書典の既刊 3冊</a:t>
             </a:r>
             <a:endParaRPr lang="en-US" sz="800" dirty="0"/>
           </a:p>
@@ -23318,7 +23318,7 @@
                 <a:ea typeface="Yu Gothic" pitchFamily="34" charset="-122"/>
                 <a:cs typeface="Yu Gothic" pitchFamily="34" charset="-120"/>
               </a:rPr>
-              <a:t>【求】同シリーズ 推し</a:t>
+              <a:t>【求】同ジャンルの新刊</a:t>
             </a:r>
             <a:endParaRPr lang="en-US" sz="800" dirty="0"/>
           </a:p>
@@ -23385,7 +23385,7 @@
                 <a:ea typeface="Yu Gothic" pitchFamily="34" charset="-122"/>
                 <a:cs typeface="Yu Gothic" pitchFamily="34" charset="-120"/>
               </a:rPr>
-              <a:t>【求】アクリルスタンド</a:t>
+              <a:t>【求】オライリーの機械学習本</a:t>
             </a:r>
             <a:endParaRPr lang="en-US" sz="800" dirty="0"/>
           </a:p>
@@ -23484,7 +23484,7 @@
       </p:sp>
       <p:pic>
         <p:nvPicPr>
-          <p:cNvPr id="3" name="Image 0" descr="C:/Users/user/otaku-match/frontend/public/logo.png">    </p:cNvPr>
+          <p:cNvPr id="3" name="Image 0" descr="C:/Users/user/otaku-match/frontend/public/logo2.png">    </p:cNvPr>
           <p:cNvPicPr>
             <a:picLocks noChangeAspect="1"/>
           </p:cNvPicPr>
@@ -23683,7 +23683,7 @@
                 <a:ea typeface="Yu Gothic" pitchFamily="34" charset="-122"/>
                 <a:cs typeface="Yu Gothic" pitchFamily="34" charset="-120"/>
               </a:rPr>
-              <a:t>グッズを撮る</a:t>
+              <a:t>本の表紙を撮る</a:t>
             </a:r>
             <a:endParaRPr lang="en-US" sz="1200" dirty="0"/>
           </a:p>

--- a/slide/MeetU_pitch.pptx
+++ b/slide/MeetU_pitch.pptx
@@ -2927,7 +2927,7 @@
             <a:r>
               <a:rPr lang="en-US" sz="3200" b="1" dirty="0">
                 <a:solidFill>
-                  <a:srgbClr val="6B7000"/>
+                  <a:srgbClr val="00705E"/>
                 </a:solidFill>
                 <a:latin typeface="Yu Gothic" pitchFamily="34" charset="0"/>
                 <a:ea typeface="Yu Gothic" pitchFamily="34" charset="-122"/>
@@ -3785,7 +3785,7 @@
             <a:r>
               <a:rPr lang="en-US" sz="1200" b="1" dirty="0">
                 <a:solidFill>
-                  <a:srgbClr val="6B7000"/>
+                  <a:srgbClr val="00705E"/>
                 </a:solidFill>
                 <a:latin typeface="Yu Gothic" pitchFamily="34" charset="0"/>
                 <a:ea typeface="Yu Gothic" pitchFamily="34" charset="-122"/>
@@ -4208,7 +4208,7 @@
             <a:r>
               <a:rPr lang="en-US" sz="2400" b="1" dirty="0">
                 <a:solidFill>
-                  <a:srgbClr val="6B7000"/>
+                  <a:srgbClr val="00705E"/>
                 </a:solidFill>
                 <a:latin typeface="Yu Gothic" pitchFamily="34" charset="0"/>
                 <a:ea typeface="Yu Gothic" pitchFamily="34" charset="-122"/>
@@ -5719,7 +5719,7 @@
             <a:r>
               <a:rPr lang="en-US" sz="2400" b="1" dirty="0">
                 <a:solidFill>
-                  <a:srgbClr val="6B7000"/>
+                  <a:srgbClr val="00705E"/>
                 </a:solidFill>
                 <a:latin typeface="Yu Gothic" pitchFamily="34" charset="0"/>
                 <a:ea typeface="Yu Gothic" pitchFamily="34" charset="-122"/>
@@ -5747,7 +5747,7 @@
             <a:r>
               <a:rPr lang="en-US" sz="2400" b="1" dirty="0">
                 <a:solidFill>
-                  <a:srgbClr val="6B7000"/>
+                  <a:srgbClr val="00705E"/>
                 </a:solidFill>
                 <a:latin typeface="Yu Gothic" pitchFamily="34" charset="0"/>
                 <a:ea typeface="Yu Gothic" pitchFamily="34" charset="-122"/>
@@ -6523,7 +6523,7 @@
             <a:r>
               <a:rPr lang="en-US" sz="3000" b="1" dirty="0">
                 <a:solidFill>
-                  <a:srgbClr val="6B7000"/>
+                  <a:srgbClr val="00705E"/>
                 </a:solidFill>
                 <a:latin typeface="Yu Gothic" pitchFamily="34" charset="0"/>
                 <a:ea typeface="Yu Gothic" pitchFamily="34" charset="-122"/>
@@ -6709,7 +6709,7 @@
             <a:r>
               <a:rPr lang="en-US" sz="2400" b="1" dirty="0">
                 <a:solidFill>
-                  <a:srgbClr val="6B7000"/>
+                  <a:srgbClr val="00705E"/>
                 </a:solidFill>
                 <a:latin typeface="Yu Gothic" pitchFamily="34" charset="0"/>
                 <a:ea typeface="Yu Gothic" pitchFamily="34" charset="-122"/>
@@ -6916,7 +6916,7 @@
             <a:r>
               <a:rPr lang="en-US" sz="1200" b="1" dirty="0">
                 <a:solidFill>
-                  <a:srgbClr val="6B7000"/>
+                  <a:srgbClr val="00705E"/>
                 </a:solidFill>
                 <a:latin typeface="Yu Gothic" pitchFamily="34" charset="0"/>
                 <a:ea typeface="Yu Gothic" pitchFamily="34" charset="-122"/>
@@ -7132,7 +7132,7 @@
             <a:r>
               <a:rPr lang="en-US" sz="1200" b="1" dirty="0">
                 <a:solidFill>
-                  <a:srgbClr val="6B7000"/>
+                  <a:srgbClr val="00705E"/>
                 </a:solidFill>
                 <a:latin typeface="Yu Gothic" pitchFamily="34" charset="0"/>
                 <a:ea typeface="Yu Gothic" pitchFamily="34" charset="-122"/>
@@ -7348,7 +7348,7 @@
             <a:r>
               <a:rPr lang="en-US" sz="1200" b="1" dirty="0">
                 <a:solidFill>
-                  <a:srgbClr val="6B7000"/>
+                  <a:srgbClr val="00705E"/>
                 </a:solidFill>
                 <a:latin typeface="Yu Gothic" pitchFamily="34" charset="0"/>
                 <a:ea typeface="Yu Gothic" pitchFamily="34" charset="-122"/>
@@ -7645,7 +7645,7 @@
             <a:r>
               <a:rPr lang="en-US" sz="2400" b="1" dirty="0">
                 <a:solidFill>
-                  <a:srgbClr val="6B7000"/>
+                  <a:srgbClr val="00705E"/>
                 </a:solidFill>
                 <a:latin typeface="Yu Gothic" pitchFamily="34" charset="0"/>
                 <a:ea typeface="Yu Gothic" pitchFamily="34" charset="-122"/>
@@ -7684,7 +7684,7 @@
             <a:r>
               <a:rPr lang="en-US" sz="1300" b="1" dirty="0">
                 <a:solidFill>
-                  <a:srgbClr val="6B7000"/>
+                  <a:srgbClr val="00705E"/>
                 </a:solidFill>
                 <a:latin typeface="Yu Gothic" pitchFamily="34" charset="0"/>
                 <a:ea typeface="Yu Gothic" pitchFamily="34" charset="-122"/>
@@ -7828,7 +7828,7 @@
             <a:r>
               <a:rPr lang="en-US" sz="6600" b="1" dirty="0">
                 <a:solidFill>
-                  <a:srgbClr val="6B7000"/>
+                  <a:srgbClr val="00705E"/>
                 </a:solidFill>
                 <a:latin typeface="Yu Gothic" pitchFamily="34" charset="0"/>
                 <a:ea typeface="Yu Gothic" pitchFamily="34" charset="-122"/>
@@ -8791,7 +8791,7 @@
             <a:r>
               <a:rPr lang="en-US" sz="2400" b="1" dirty="0">
                 <a:solidFill>
-                  <a:srgbClr val="6B7000"/>
+                  <a:srgbClr val="00705E"/>
                 </a:solidFill>
                 <a:latin typeface="Yu Gothic" pitchFamily="34" charset="0"/>
                 <a:ea typeface="Yu Gothic" pitchFamily="34" charset="-122"/>
@@ -9423,7 +9423,7 @@
             <a:r>
               <a:rPr lang="en-US" sz="2400" b="1" dirty="0">
                 <a:solidFill>
-                  <a:srgbClr val="6B7000"/>
+                  <a:srgbClr val="00705E"/>
                 </a:solidFill>
                 <a:latin typeface="Yu Gothic" pitchFamily="34" charset="0"/>
                 <a:ea typeface="Yu Gothic" pitchFamily="34" charset="-122"/>
@@ -11347,7 +11347,7 @@
             <a:r>
               <a:rPr lang="en-US" sz="2000" b="1" dirty="0">
                 <a:solidFill>
-                  <a:srgbClr val="6B7000"/>
+                  <a:srgbClr val="00705E"/>
                 </a:solidFill>
                 <a:latin typeface="Yu Gothic" pitchFamily="34" charset="0"/>
                 <a:ea typeface="Yu Gothic" pitchFamily="34" charset="-122"/>
@@ -12284,7 +12284,7 @@
             <a:r>
               <a:rPr lang="en-US" sz="2000" b="1" dirty="0">
                 <a:solidFill>
-                  <a:srgbClr val="6B7000"/>
+                  <a:srgbClr val="00705E"/>
                 </a:solidFill>
                 <a:latin typeface="Yu Gothic" pitchFamily="34" charset="0"/>
                 <a:ea typeface="Yu Gothic" pitchFamily="34" charset="-122"/>
@@ -12533,7 +12533,7 @@
             <a:r>
               <a:rPr lang="en-US" sz="3000" b="1" dirty="0">
                 <a:solidFill>
-                  <a:srgbClr val="6B7000"/>
+                  <a:srgbClr val="00705E"/>
                 </a:solidFill>
                 <a:latin typeface="Yu Gothic" pitchFamily="34" charset="0"/>
                 <a:ea typeface="Yu Gothic" pitchFamily="34" charset="-122"/>
@@ -12758,7 +12758,7 @@
             <a:r>
               <a:rPr lang="en-US" sz="2200" b="1" dirty="0">
                 <a:solidFill>
-                  <a:srgbClr val="6B7000"/>
+                  <a:srgbClr val="00705E"/>
                 </a:solidFill>
                 <a:latin typeface="Yu Gothic" pitchFamily="34" charset="0"/>
                 <a:ea typeface="Yu Gothic" pitchFamily="34" charset="-122"/>
@@ -13266,7 +13266,7 @@
             <a:r>
               <a:rPr lang="en-US" sz="2400" b="1" dirty="0">
                 <a:solidFill>
-                  <a:srgbClr val="6B7000"/>
+                  <a:srgbClr val="00705E"/>
                 </a:solidFill>
                 <a:latin typeface="Yu Gothic" pitchFamily="34" charset="0"/>
                 <a:ea typeface="Yu Gothic" pitchFamily="34" charset="-122"/>
@@ -14102,7 +14102,7 @@
             <a:r>
               <a:rPr lang="en-US" sz="4800" b="1" dirty="0">
                 <a:solidFill>
-                  <a:srgbClr val="6B7000"/>
+                  <a:srgbClr val="00705E"/>
                 </a:solidFill>
                 <a:latin typeface="Yu Gothic" pitchFamily="34" charset="0"/>
                 <a:ea typeface="Yu Gothic" pitchFamily="34" charset="-122"/>
@@ -14288,7 +14288,7 @@
             <a:r>
               <a:rPr lang="en-US" sz="2400" b="1" dirty="0">
                 <a:solidFill>
-                  <a:srgbClr val="6B7000"/>
+                  <a:srgbClr val="00705E"/>
                 </a:solidFill>
                 <a:latin typeface="Yu Gothic" pitchFamily="34" charset="0"/>
                 <a:ea typeface="Yu Gothic" pitchFamily="34" charset="-122"/>
@@ -14341,7 +14341,7 @@
             <a:r>
               <a:rPr lang="en-US" sz="1300" b="1" dirty="0">
                 <a:solidFill>
-                  <a:srgbClr val="6B7000"/>
+                  <a:srgbClr val="00705E"/>
                 </a:solidFill>
                 <a:latin typeface="Yu Gothic" pitchFamily="34" charset="0"/>
                 <a:ea typeface="Yu Gothic" pitchFamily="34" charset="-122"/>
@@ -14407,7 +14407,7 @@
             <a:r>
               <a:rPr lang="en-US" sz="4400" b="1" dirty="0">
                 <a:solidFill>
-                  <a:srgbClr val="6B7000"/>
+                  <a:srgbClr val="00705E"/>
                 </a:solidFill>
                 <a:latin typeface="Yu Gothic" pitchFamily="34" charset="0"/>
                 <a:ea typeface="Yu Gothic" pitchFamily="34" charset="-122"/>
@@ -15069,7 +15069,7 @@
             <a:r>
               <a:rPr lang="en-US" sz="3200" b="1" dirty="0">
                 <a:solidFill>
-                  <a:srgbClr val="6B7000"/>
+                  <a:srgbClr val="00705E"/>
                 </a:solidFill>
                 <a:latin typeface="Yu Gothic" pitchFamily="34" charset="0"/>
                 <a:ea typeface="Yu Gothic" pitchFamily="34" charset="-122"/>
@@ -15927,7 +15927,7 @@
             <a:r>
               <a:rPr lang="en-US" sz="1200" b="1" dirty="0">
                 <a:solidFill>
-                  <a:srgbClr val="6B7000"/>
+                  <a:srgbClr val="00705E"/>
                 </a:solidFill>
                 <a:latin typeface="Yu Gothic" pitchFamily="34" charset="0"/>
                 <a:ea typeface="Yu Gothic" pitchFamily="34" charset="-122"/>
@@ -16350,7 +16350,7 @@
             <a:r>
               <a:rPr lang="en-US" sz="2400" b="1" dirty="0">
                 <a:solidFill>
-                  <a:srgbClr val="6B7000"/>
+                  <a:srgbClr val="00705E"/>
                 </a:solidFill>
                 <a:latin typeface="Yu Gothic" pitchFamily="34" charset="0"/>
                 <a:ea typeface="Yu Gothic" pitchFamily="34" charset="-122"/>
@@ -17005,7 +17005,7 @@
             <a:r>
               <a:rPr lang="en-US" sz="3600" b="1" dirty="0">
                 <a:solidFill>
-                  <a:srgbClr val="6B7000"/>
+                  <a:srgbClr val="00705E"/>
                 </a:solidFill>
                 <a:latin typeface="Yu Gothic" pitchFamily="34" charset="0"/>
                 <a:ea typeface="Yu Gothic" pitchFamily="34" charset="-122"/>
@@ -17249,7 +17249,7 @@
             <a:r>
               <a:rPr lang="en-US" sz="3200" b="1" dirty="0">
                 <a:solidFill>
-                  <a:srgbClr val="6B7000"/>
+                  <a:srgbClr val="00705E"/>
                 </a:solidFill>
                 <a:latin typeface="Yu Gothic" pitchFamily="34" charset="0"/>
                 <a:ea typeface="Yu Gothic" pitchFamily="34" charset="-122"/>
@@ -18107,7 +18107,7 @@
             <a:r>
               <a:rPr lang="en-US" sz="1200" b="1" dirty="0">
                 <a:solidFill>
-                  <a:srgbClr val="6B7000"/>
+                  <a:srgbClr val="00705E"/>
                 </a:solidFill>
                 <a:latin typeface="Yu Gothic" pitchFamily="34" charset="0"/>
                 <a:ea typeface="Yu Gothic" pitchFamily="34" charset="-122"/>
@@ -18516,7 +18516,7 @@
             <a:r>
               <a:rPr lang="en-US" sz="2400" b="1" dirty="0">
                 <a:solidFill>
-                  <a:srgbClr val="6B7000"/>
+                  <a:srgbClr val="00705E"/>
                 </a:solidFill>
                 <a:latin typeface="Yu Gothic" pitchFamily="34" charset="0"/>
                 <a:ea typeface="Yu Gothic" pitchFamily="34" charset="-122"/>
@@ -18544,7 +18544,7 @@
             <a:r>
               <a:rPr lang="en-US" sz="2400" b="1" dirty="0">
                 <a:solidFill>
-                  <a:srgbClr val="6B7000"/>
+                  <a:srgbClr val="00705E"/>
                 </a:solidFill>
                 <a:latin typeface="Yu Gothic" pitchFamily="34" charset="0"/>
                 <a:ea typeface="Yu Gothic" pitchFamily="34" charset="-122"/>
@@ -20113,7 +20113,7 @@
             <a:r>
               <a:rPr lang="en-US" sz="2400" b="1" dirty="0">
                 <a:solidFill>
-                  <a:srgbClr val="6B7000"/>
+                  <a:srgbClr val="00705E"/>
                 </a:solidFill>
                 <a:latin typeface="Yu Gothic" pitchFamily="34" charset="0"/>
                 <a:ea typeface="Yu Gothic" pitchFamily="34" charset="-122"/>
@@ -21086,7 +21086,7 @@
             <a:r>
               <a:rPr lang="en-US" sz="2400" b="1" dirty="0">
                 <a:solidFill>
-                  <a:srgbClr val="6B7000"/>
+                  <a:srgbClr val="00705E"/>
                 </a:solidFill>
                 <a:latin typeface="Yu Gothic" pitchFamily="34" charset="0"/>
                 <a:ea typeface="Yu Gothic" pitchFamily="34" charset="-122"/>
@@ -21139,7 +21139,7 @@
             <a:r>
               <a:rPr lang="en-US" sz="1300" b="1" dirty="0">
                 <a:solidFill>
-                  <a:srgbClr val="6B7000"/>
+                  <a:srgbClr val="00705E"/>
                 </a:solidFill>
                 <a:latin typeface="Yu Gothic" pitchFamily="34" charset="0"/>
                 <a:ea typeface="Yu Gothic" pitchFamily="34" charset="-122"/>
@@ -21860,7 +21860,7 @@
             <a:r>
               <a:rPr lang="en-US" sz="2200" b="1" dirty="0">
                 <a:solidFill>
-                  <a:srgbClr val="6B7000"/>
+                  <a:srgbClr val="00705E"/>
                 </a:solidFill>
                 <a:latin typeface="Yu Gothic" pitchFamily="34" charset="0"/>
                 <a:ea typeface="Yu Gothic" pitchFamily="34" charset="-122"/>
@@ -22806,7 +22806,7 @@
             <a:r>
               <a:rPr lang="en-US" sz="2400" b="1" dirty="0">
                 <a:solidFill>
-                  <a:srgbClr val="6B7000"/>
+                  <a:srgbClr val="00705E"/>
                 </a:solidFill>
                 <a:latin typeface="Yu Gothic" pitchFamily="34" charset="0"/>
                 <a:ea typeface="Yu Gothic" pitchFamily="34" charset="-122"/>
@@ -23585,7 +23585,7 @@
             <a:r>
               <a:rPr lang="en-US" sz="2400" b="1" dirty="0">
                 <a:solidFill>
-                  <a:srgbClr val="6B7000"/>
+                  <a:srgbClr val="00705E"/>
                 </a:solidFill>
                 <a:latin typeface="Yu Gothic" pitchFamily="34" charset="0"/>
                 <a:ea typeface="Yu Gothic" pitchFamily="34" charset="-122"/>

--- a/slide/MeetU_pitch.pptx
+++ b/slide/MeetU_pitch.pptx
@@ -523,7 +523,7 @@
           <a:p>
             <a:r>
               <a:rPr lang="en-US" dirty="0"/>
-              <a:t>MeetU は、技術書の【譲】と【求】をタグでつなぎ、1対1で組めない交換も3〜4人の輪にして、受け渡しの移動距離が最短になる組み合わせを提案するサービスです。</a:t>
+              <a:t>MeetU は、推し活グッズの【譲】と【求】をタグでつなぎ、1対1で組めない交換も3〜4人の輪にして、受け渡しの移動距離が最短になる組み合わせを提案するサービスです。</a:t>
             </a:r>
             <a:endParaRPr lang="en-US" dirty="0"/>
           </a:p>
@@ -611,7 +611,7 @@
           <a:p>
             <a:r>
               <a:rPr lang="en-US" dirty="0"/>
-              <a:t>『リーダブル』で検索しても『リーダブルコード』のカードが出る。埋め込むのはカードではなくタグなので、カードが増えてもベクトル数は語彙数で頭打ちになります。マッチングの判定そのものはタグ一致のままで、ベクトルは名寄せにだけ使います。</a:t>
+              <a:t>『五条』で検索しても『五条悟』のカードが出る。埋め込むのはカードではなくタグなので、カードが増えてもベクトル数は語彙数で頭打ちになります。マッチングの判定そのものはタグ一致のままで、ベクトルは名寄せにだけ使います。</a:t>
             </a:r>
             <a:endParaRPr lang="en-US" dirty="0"/>
           </a:p>
@@ -699,7 +699,7 @@
           <a:p>
             <a:r>
               <a:rPr lang="en-US" dirty="0"/>
-              <a:t>汎用のフリマや SNS 投稿は手軽ですが、技術書のタグ構造も、3人以上の交換も扱えません。MeetU は技術書特化で、しかも登録するだけの手軽さを両立します。</a:t>
+              <a:t>汎用のフリマや SNS 投稿は手軽ですが、推し活のタグ構造も、3人以上の交換も扱えません。MeetU は推し活特化で、しかも登録するだけの手軽さを両立します。</a:t>
             </a:r>
             <a:endParaRPr lang="en-US" dirty="0"/>
           </a:p>
@@ -787,7 +787,7 @@
           <a:p>
             <a:r>
               <a:rPr lang="en-US" dirty="0"/>
-              <a:t>私たちが目指すのは、交換が“噛み合わない”で終わらず、読み終えた技術書がちゃんと次の人に届く世界です。</a:t>
+              <a:t>私たちが目指すのは、交換が“噛み合わない”で終わらず、手放したグッズがちゃんと次の人に届く世界です。</a:t>
             </a:r>
             <a:endParaRPr lang="en-US" dirty="0"/>
           </a:p>
@@ -1403,7 +1403,7 @@
           <a:p>
             <a:r>
               <a:rPr lang="en-US" dirty="0"/>
-              <a:t>ユーザーにとっては読み終えた本が次に届く安心、エンジニアのコミュニティにとっては交換が勉強会の外でも回り続ける基盤を目指します。</a:t>
+              <a:t>ユーザーにとっては手放したものが届く安心、コミュニティにとっては交換が会場の外でも回り続ける基盤を目指します。</a:t>
             </a:r>
             <a:endParaRPr lang="en-US" dirty="0"/>
           </a:p>
@@ -1491,7 +1491,7 @@
           <a:p>
             <a:r>
               <a:rPr lang="en-US" dirty="0"/>
-              <a:t>技術書の交換は、SNSの譲渡投稿を目で追うのが主流です。見つからない、噛み合わない、1対1では成立しない、の3つで止まります。</a:t>
+              <a:t>推し活のグッズ交換は、SNSの譲渡投稿を目で追うのが主流です。見つからない、噛み合わない、1対1では成立しない、の3つで止まります。</a:t>
             </a:r>
             <a:endParaRPr lang="en-US" dirty="0"/>
           </a:p>
@@ -1579,7 +1579,7 @@
           <a:p>
             <a:r>
               <a:rPr lang="en-US" dirty="0"/>
-              <a:t>最終的には、技術書の【譲】と【求】がすべて MeetU の上でつながる、交換のインフラになることを目指します。</a:t>
+              <a:t>最終的には、推し活の【譲】と【求】がすべて MeetU の上でつながる、交換のインフラになることを目指します。</a:t>
             </a:r>
             <a:endParaRPr lang="en-US" dirty="0"/>
           </a:p>
@@ -2371,7 +2371,7 @@
           <a:p>
             <a:r>
               <a:rPr lang="en-US" dirty="0"/>
-              <a:t>タグの品質がマッチングの精度を決めます。だから入力を人に頼らず、表紙の写真からビジョンLLMで書名・著者・出版社・分野のタグ候補を出します。カテゴリはJSONで制約し、最終確定はユーザーが行います。</a:t>
+              <a:t>タグの品質がマッチングの精度を決めます。だから入力を人に頼らず、写真からビジョンLLMでタグ候補を出します。カテゴリはJSONで制約し、最終確定はユーザーが行います。</a:t>
             </a:r>
             <a:endParaRPr lang="en-US" dirty="0"/>
           </a:p>
@@ -2759,11 +2759,11 @@
             <a:avLst/>
           </a:prstGeom>
           <a:solidFill>
-            <a:srgbClr val="F8FF3E"/>
+            <a:srgbClr val="E43D81"/>
           </a:solidFill>
           <a:ln w="12700">
             <a:solidFill>
-              <a:srgbClr val="F8FF3E"/>
+              <a:srgbClr val="E43D81"/>
             </a:solidFill>
             <a:prstDash val="solid"/>
           </a:ln>
@@ -2784,11 +2784,11 @@
             <a:avLst/>
           </a:prstGeom>
           <a:solidFill>
-            <a:srgbClr val="D7FDF6"/>
+            <a:srgbClr val="DDF8F3"/>
           </a:solidFill>
           <a:ln w="12700">
             <a:solidFill>
-              <a:srgbClr val="D7FDF6"/>
+              <a:srgbClr val="DDF8F3"/>
             </a:solidFill>
             <a:prstDash val="solid"/>
           </a:ln>
@@ -2823,7 +2823,7 @@
       </p:sp>
       <p:pic>
         <p:nvPicPr>
-          <p:cNvPr id="5" name="Image 0" descr="C:/Users/user/otaku-match/frontend/public/logo2.png">    </p:cNvPr>
+          <p:cNvPr id="5" name="Image 0" descr="C:/Users/user/otaku-match/frontend/public/logo.png">    </p:cNvPr>
           <p:cNvPicPr>
             <a:picLocks noChangeAspect="1"/>
           </p:cNvPicPr>
@@ -2927,7 +2927,7 @@
             <a:r>
               <a:rPr lang="en-US" sz="3200" b="1" dirty="0">
                 <a:solidFill>
-                  <a:srgbClr val="00705E"/>
+                  <a:srgbClr val="E43D81"/>
                 </a:solidFill>
                 <a:latin typeface="Yu Gothic" pitchFamily="34" charset="0"/>
                 <a:ea typeface="Yu Gothic" pitchFamily="34" charset="-122"/>
@@ -2986,7 +2986,7 @@
                 <a:ea typeface="Yu Gothic" pitchFamily="34" charset="-122"/>
                 <a:cs typeface="Yu Gothic" pitchFamily="34" charset="-120"/>
               </a:rPr>
-              <a:t>積ん読と探している本を、</a:t>
+              <a:t>推し活のグッズ交換を、</a:t>
             </a:r>
             <a:pPr indent="0" marL="0">
               <a:buNone/>
@@ -2994,7 +2994,7 @@
             <a:r>
               <a:rPr lang="en-US" sz="1300" b="1" dirty="0">
                 <a:solidFill>
-                  <a:srgbClr val="00705E"/>
+                  <a:srgbClr val="00997F"/>
                 </a:solidFill>
                 <a:latin typeface="Yu Gothic" pitchFamily="34" charset="0"/>
                 <a:ea typeface="Yu Gothic" pitchFamily="34" charset="-122"/>
@@ -3014,7 +3014,7 @@
                 <a:ea typeface="Yu Gothic" pitchFamily="34" charset="-122"/>
                 <a:cs typeface="Yu Gothic" pitchFamily="34" charset="-120"/>
               </a:rPr>
-              <a:t>とつなぐ</a:t>
+              <a:t>とつなぐマッチング</a:t>
             </a:r>
             <a:endParaRPr lang="en-US" sz="1300" dirty="0"/>
           </a:p>
@@ -3116,7 +3116,7 @@
             <a:avLst/>
           </a:prstGeom>
           <a:solidFill>
-            <a:srgbClr val="F8FF3E"/>
+            <a:srgbClr val="E43D81"/>
           </a:solidFill>
           <a:ln w="19050">
             <a:solidFill>
@@ -3153,7 +3153,7 @@
             <a:r>
               <a:rPr lang="en-US" sz="1200" b="1" dirty="0">
                 <a:solidFill>
-                  <a:srgbClr val="1C1B1B"/>
+                  <a:srgbClr val="FFFFFF"/>
                 </a:solidFill>
                 <a:latin typeface="Yu Gothic" pitchFamily="34" charset="0"/>
                 <a:ea typeface="Yu Gothic" pitchFamily="34" charset="-122"/>
@@ -3221,7 +3221,7 @@
             </a:avLst>
           </a:prstGeom>
           <a:solidFill>
-            <a:srgbClr val="D7FDF6"/>
+            <a:srgbClr val="DDF8F3"/>
           </a:solidFill>
           <a:ln w="19050">
             <a:solidFill>
@@ -3248,7 +3248,7 @@
             </a:avLst>
           </a:prstGeom>
           <a:solidFill>
-            <a:srgbClr val="F8FF3E"/>
+            <a:srgbClr val="E43D81"/>
           </a:solidFill>
           <a:ln w="15875">
             <a:solidFill>
@@ -3695,7 +3695,7 @@
             </a:avLst>
           </a:prstGeom>
           <a:solidFill>
-            <a:srgbClr val="F8FF3E"/>
+            <a:srgbClr val="E43D81"/>
           </a:solidFill>
           <a:ln w="15875">
             <a:solidFill>
@@ -3785,7 +3785,7 @@
             <a:r>
               <a:rPr lang="en-US" sz="1200" b="1" dirty="0">
                 <a:solidFill>
-                  <a:srgbClr val="00705E"/>
+                  <a:srgbClr val="C62F6D"/>
                 </a:solidFill>
                 <a:latin typeface="Yu Gothic" pitchFamily="34" charset="0"/>
                 <a:ea typeface="Yu Gothic" pitchFamily="34" charset="-122"/>
@@ -3845,7 +3845,7 @@
         <p:spPr>
           <a:xfrm>
             <a:off x="6199632" y="3300984"/>
-            <a:ext cx="566928" cy="237744"/>
+            <a:ext cx="658368" cy="237744"/>
           </a:xfrm>
           <a:prstGeom prst="roundRect">
             <a:avLst>
@@ -3853,7 +3853,7 @@
             </a:avLst>
           </a:prstGeom>
           <a:solidFill>
-            <a:srgbClr val="1C1B1B"/>
+            <a:srgbClr val="CB9605"/>
           </a:solidFill>
           <a:ln w="15875">
             <a:solidFill>
@@ -3872,7 +3872,7 @@
         <p:spPr>
           <a:xfrm>
             <a:off x="6199632" y="3300984"/>
-            <a:ext cx="566928" cy="237744"/>
+            <a:ext cx="658368" cy="237744"/>
           </a:xfrm>
           <a:prstGeom prst="rect">
             <a:avLst/>
@@ -3890,13 +3890,13 @@
             <a:r>
               <a:rPr lang="en-US" sz="800" b="1" dirty="0">
                 <a:solidFill>
-                  <a:srgbClr val="FFFFFF"/>
-                </a:solidFill>
-                <a:latin typeface="Yu Gothic" pitchFamily="34" charset="0"/>
-                <a:ea typeface="Yu Gothic" pitchFamily="34" charset="-122"/>
-                <a:cs typeface="Yu Gothic" pitchFamily="34" charset="-120"/>
-              </a:rPr>
-              <a:t>Rust</a:t>
+                  <a:srgbClr val="1C1B1B"/>
+                </a:solidFill>
+                <a:latin typeface="Yu Gothic" pitchFamily="34" charset="0"/>
+                <a:ea typeface="Yu Gothic" pitchFamily="34" charset="-122"/>
+                <a:cs typeface="Yu Gothic" pitchFamily="34" charset="-120"/>
+              </a:rPr>
+              <a:t>プロセカ</a:t>
             </a:r>
             <a:endParaRPr lang="en-US" sz="800" dirty="0"/>
           </a:p>
@@ -3910,8 +3910,8 @@
         </p:nvSpPr>
         <p:spPr>
           <a:xfrm>
-            <a:off x="6839712" y="3300984"/>
-            <a:ext cx="786384" cy="237744"/>
+            <a:off x="6931152" y="3300984"/>
+            <a:ext cx="566928" cy="237744"/>
           </a:xfrm>
           <a:prstGeom prst="roundRect">
             <a:avLst>
@@ -3919,7 +3919,7 @@
             </a:avLst>
           </a:prstGeom>
           <a:solidFill>
-            <a:srgbClr val="1C1B1B"/>
+            <a:srgbClr val="CB9605"/>
           </a:solidFill>
           <a:ln w="15875">
             <a:solidFill>
@@ -3937,8 +3937,8 @@
         </p:nvSpPr>
         <p:spPr>
           <a:xfrm>
-            <a:off x="6839712" y="3300984"/>
-            <a:ext cx="786384" cy="237744"/>
+            <a:off x="6931152" y="3300984"/>
+            <a:ext cx="566928" cy="237744"/>
           </a:xfrm>
           <a:prstGeom prst="rect">
             <a:avLst/>
@@ -3956,13 +3956,13 @@
             <a:r>
               <a:rPr lang="en-US" sz="800" b="1" dirty="0">
                 <a:solidFill>
-                  <a:srgbClr val="FFFFFF"/>
-                </a:solidFill>
-                <a:latin typeface="Yu Gothic" pitchFamily="34" charset="0"/>
-                <a:ea typeface="Yu Gothic" pitchFamily="34" charset="-122"/>
-                <a:cs typeface="Yu Gothic" pitchFamily="34" charset="-120"/>
-              </a:rPr>
-              <a:t>オライリー</a:t>
+                  <a:srgbClr val="1C1B1B"/>
+                </a:solidFill>
+                <a:latin typeface="Yu Gothic" pitchFamily="34" charset="0"/>
+                <a:ea typeface="Yu Gothic" pitchFamily="34" charset="-122"/>
+                <a:cs typeface="Yu Gothic" pitchFamily="34" charset="-120"/>
+              </a:rPr>
+              <a:t>天馬司</a:t>
             </a:r>
             <a:endParaRPr lang="en-US" sz="800" dirty="0"/>
           </a:p>
@@ -3985,7 +3985,7 @@
             </a:avLst>
           </a:prstGeom>
           <a:solidFill>
-            <a:srgbClr val="F8FF3E"/>
+            <a:srgbClr val="E43D81"/>
           </a:solidFill>
           <a:ln w="19050">
             <a:solidFill>
@@ -4022,7 +4022,7 @@
             <a:r>
               <a:rPr lang="en-US" sz="900" b="1" dirty="0">
                 <a:solidFill>
-                  <a:srgbClr val="1C1B1B"/>
+                  <a:srgbClr val="FFFFFF"/>
                 </a:solidFill>
                 <a:latin typeface="Yu Gothic" pitchFamily="34" charset="0"/>
                 <a:ea typeface="Yu Gothic" pitchFamily="34" charset="-122"/>
@@ -4107,7 +4107,7 @@
       </p:sp>
       <p:pic>
         <p:nvPicPr>
-          <p:cNvPr id="3" name="Image 0" descr="C:/Users/user/otaku-match/frontend/public/logo2.png">    </p:cNvPr>
+          <p:cNvPr id="3" name="Image 0" descr="C:/Users/user/otaku-match/frontend/public/logo.png">    </p:cNvPr>
           <p:cNvPicPr>
             <a:picLocks noChangeAspect="1"/>
           </p:cNvPicPr>
@@ -4208,13 +4208,13 @@
             <a:r>
               <a:rPr lang="en-US" sz="2400" b="1" dirty="0">
                 <a:solidFill>
-                  <a:srgbClr val="00705E"/>
-                </a:solidFill>
-                <a:latin typeface="Yu Gothic" pitchFamily="34" charset="0"/>
-                <a:ea typeface="Yu Gothic" pitchFamily="34" charset="-122"/>
-                <a:cs typeface="Yu Gothic" pitchFamily="34" charset="-120"/>
-              </a:rPr>
-              <a:t>同じ本</a:t>
+                  <a:srgbClr val="E43D81"/>
+                </a:solidFill>
+                <a:latin typeface="Yu Gothic" pitchFamily="34" charset="0"/>
+                <a:ea typeface="Yu Gothic" pitchFamily="34" charset="-122"/>
+                <a:cs typeface="Yu Gothic" pitchFamily="34" charset="-120"/>
+              </a:rPr>
+              <a:t>同じグッズ</a:t>
             </a:r>
             <a:pPr algn="ctr" indent="0" marL="0">
               <a:buNone/>
@@ -4360,7 +4360,7 @@
                 <a:ea typeface="Yu Gothic" pitchFamily="34" charset="-122"/>
                 <a:cs typeface="Yu Gothic" pitchFamily="34" charset="-120"/>
               </a:rPr>
-              <a:t>リーダブル</a:t>
+              <a:t>五条</a:t>
             </a:r>
             <a:endParaRPr lang="en-US" sz="1000" dirty="0"/>
           </a:p>
@@ -4407,7 +4407,7 @@
             </a:avLst>
           </a:prstGeom>
           <a:solidFill>
-            <a:srgbClr val="1C1B1B"/>
+            <a:srgbClr val="CB9605"/>
           </a:solidFill>
           <a:ln w="15875">
             <a:solidFill>
@@ -4444,13 +4444,13 @@
             <a:r>
               <a:rPr lang="en-US" sz="1000" b="1" dirty="0">
                 <a:solidFill>
-                  <a:srgbClr val="FFFFFF"/>
-                </a:solidFill>
-                <a:latin typeface="Yu Gothic" pitchFamily="34" charset="0"/>
-                <a:ea typeface="Yu Gothic" pitchFamily="34" charset="-122"/>
-                <a:cs typeface="Yu Gothic" pitchFamily="34" charset="-120"/>
-              </a:rPr>
-              <a:t>リーダブルコード</a:t>
+                  <a:srgbClr val="1C1B1B"/>
+                </a:solidFill>
+                <a:latin typeface="Yu Gothic" pitchFamily="34" charset="0"/>
+                <a:ea typeface="Yu Gothic" pitchFamily="34" charset="-122"/>
+                <a:cs typeface="Yu Gothic" pitchFamily="34" charset="-120"/>
+              </a:rPr>
+              <a:t>五条悟</a:t>
             </a:r>
             <a:endParaRPr lang="en-US" sz="1000" dirty="0"/>
           </a:p>
@@ -4516,7 +4516,7 @@
                 <a:ea typeface="Yu Gothic" pitchFamily="34" charset="-122"/>
                 <a:cs typeface="Yu Gothic" pitchFamily="34" charset="-120"/>
               </a:rPr>
-              <a:t>オライリー</a:t>
+              <a:t>アクスタ</a:t>
             </a:r>
             <a:endParaRPr lang="en-US" sz="1000" dirty="0"/>
           </a:p>
@@ -4563,7 +4563,7 @@
             </a:avLst>
           </a:prstGeom>
           <a:solidFill>
-            <a:srgbClr val="1C1B1B"/>
+            <a:srgbClr val="CB9605"/>
           </a:solidFill>
           <a:ln w="15875">
             <a:solidFill>
@@ -4600,13 +4600,13 @@
             <a:r>
               <a:rPr lang="en-US" sz="1000" b="1" dirty="0">
                 <a:solidFill>
-                  <a:srgbClr val="FFFFFF"/>
-                </a:solidFill>
-                <a:latin typeface="Yu Gothic" pitchFamily="34" charset="0"/>
-                <a:ea typeface="Yu Gothic" pitchFamily="34" charset="-122"/>
-                <a:cs typeface="Yu Gothic" pitchFamily="34" charset="-120"/>
-              </a:rPr>
-              <a:t>O'Reilly</a:t>
+                  <a:srgbClr val="1C1B1B"/>
+                </a:solidFill>
+                <a:latin typeface="Yu Gothic" pitchFamily="34" charset="0"/>
+                <a:ea typeface="Yu Gothic" pitchFamily="34" charset="-122"/>
+                <a:cs typeface="Yu Gothic" pitchFamily="34" charset="-120"/>
+              </a:rPr>
+              <a:t>アクリルスタンド</a:t>
             </a:r>
             <a:endParaRPr lang="en-US" sz="1000" dirty="0"/>
           </a:p>
@@ -4672,7 +4672,7 @@
                 <a:ea typeface="Yu Gothic" pitchFamily="34" charset="-122"/>
                 <a:cs typeface="Yu Gothic" pitchFamily="34" charset="-120"/>
               </a:rPr>
-              <a:t>達人</a:t>
+              <a:t>ごじょう</a:t>
             </a:r>
             <a:endParaRPr lang="en-US" sz="1000" dirty="0"/>
           </a:p>
@@ -4719,7 +4719,7 @@
             </a:avLst>
           </a:prstGeom>
           <a:solidFill>
-            <a:srgbClr val="1C1B1B"/>
+            <a:srgbClr val="CB9605"/>
           </a:solidFill>
           <a:ln w="15875">
             <a:solidFill>
@@ -4756,13 +4756,13 @@
             <a:r>
               <a:rPr lang="en-US" sz="1000" b="1" dirty="0">
                 <a:solidFill>
-                  <a:srgbClr val="FFFFFF"/>
-                </a:solidFill>
-                <a:latin typeface="Yu Gothic" pitchFamily="34" charset="0"/>
-                <a:ea typeface="Yu Gothic" pitchFamily="34" charset="-122"/>
-                <a:cs typeface="Yu Gothic" pitchFamily="34" charset="-120"/>
-              </a:rPr>
-              <a:t>達人プログラマー</a:t>
+                  <a:srgbClr val="1C1B1B"/>
+                </a:solidFill>
+                <a:latin typeface="Yu Gothic" pitchFamily="34" charset="0"/>
+                <a:ea typeface="Yu Gothic" pitchFamily="34" charset="-122"/>
+                <a:cs typeface="Yu Gothic" pitchFamily="34" charset="-120"/>
+              </a:rPr>
+              <a:t>五条悟</a:t>
             </a:r>
             <a:endParaRPr lang="en-US" sz="1000" dirty="0"/>
           </a:p>
@@ -4970,7 +4970,7 @@
             <a:avLst/>
           </a:prstGeom>
           <a:solidFill>
-            <a:srgbClr val="F8FF3E"/>
+            <a:srgbClr val="E43D81"/>
           </a:solidFill>
           <a:ln w="19050">
             <a:solidFill>
@@ -5007,7 +5007,7 @@
             <a:r>
               <a:rPr lang="en-US" sz="1200" b="1" dirty="0">
                 <a:solidFill>
-                  <a:srgbClr val="1C1B1B"/>
+                  <a:srgbClr val="FFFFFF"/>
                 </a:solidFill>
                 <a:latin typeface="Yu Gothic" pitchFamily="34" charset="0"/>
                 <a:ea typeface="Yu Gothic" pitchFamily="34" charset="-122"/>
@@ -5079,7 +5079,7 @@
                 <a:ea typeface="Yu Gothic" pitchFamily="34" charset="-122"/>
                 <a:cs typeface="Yu Gothic" pitchFamily="34" charset="-120"/>
               </a:rPr>
-              <a:t>リーダブル 入門</a:t>
+              <a:t>五条 アクスタ</a:t>
             </a:r>
             <a:endParaRPr lang="en-US" sz="900" dirty="0"/>
           </a:p>
@@ -5141,7 +5141,7 @@
             </a:avLst>
           </a:prstGeom>
           <a:solidFill>
-            <a:srgbClr val="D7FDF6"/>
+            <a:srgbClr val="DDF8F3"/>
           </a:solidFill>
           <a:ln w="19050">
             <a:solidFill>
@@ -5199,7 +5199,7 @@
         <p:spPr>
           <a:xfrm>
             <a:off x="6473952" y="2615184"/>
-            <a:ext cx="822960" cy="237744"/>
+            <a:ext cx="388620" cy="237744"/>
           </a:xfrm>
           <a:prstGeom prst="roundRect">
             <a:avLst>
@@ -5207,7 +5207,7 @@
             </a:avLst>
           </a:prstGeom>
           <a:solidFill>
-            <a:srgbClr val="1C1B1B"/>
+            <a:srgbClr val="CB9605"/>
           </a:solidFill>
           <a:ln w="15875">
             <a:solidFill>
@@ -5226,7 +5226,7 @@
         <p:spPr>
           <a:xfrm>
             <a:off x="6473952" y="2615184"/>
-            <a:ext cx="822960" cy="237744"/>
+            <a:ext cx="388620" cy="237744"/>
           </a:xfrm>
           <a:prstGeom prst="rect">
             <a:avLst/>
@@ -5244,13 +5244,13 @@
             <a:r>
               <a:rPr lang="en-US" sz="700" b="1" dirty="0">
                 <a:solidFill>
-                  <a:srgbClr val="FFFFFF"/>
-                </a:solidFill>
-                <a:latin typeface="Yu Gothic" pitchFamily="34" charset="0"/>
-                <a:ea typeface="Yu Gothic" pitchFamily="34" charset="-122"/>
-                <a:cs typeface="Yu Gothic" pitchFamily="34" charset="-120"/>
-              </a:rPr>
-              <a:t>リーダブルコード</a:t>
+                  <a:srgbClr val="1C1B1B"/>
+                </a:solidFill>
+                <a:latin typeface="Yu Gothic" pitchFamily="34" charset="0"/>
+                <a:ea typeface="Yu Gothic" pitchFamily="34" charset="-122"/>
+                <a:cs typeface="Yu Gothic" pitchFamily="34" charset="-120"/>
+              </a:rPr>
+              <a:t>五条悟</a:t>
             </a:r>
             <a:endParaRPr lang="en-US" sz="700" dirty="0"/>
           </a:p>
@@ -5264,8 +5264,8 @@
         </p:nvSpPr>
         <p:spPr>
           <a:xfrm>
-            <a:off x="7342632" y="2615184"/>
-            <a:ext cx="301752" cy="237744"/>
+            <a:off x="6908292" y="2615184"/>
+            <a:ext cx="822960" cy="237744"/>
           </a:xfrm>
           <a:prstGeom prst="roundRect">
             <a:avLst>
@@ -5273,7 +5273,7 @@
             </a:avLst>
           </a:prstGeom>
           <a:solidFill>
-            <a:srgbClr val="1C1B1B"/>
+            <a:srgbClr val="CB9605"/>
           </a:solidFill>
           <a:ln w="15875">
             <a:solidFill>
@@ -5291,8 +5291,8 @@
         </p:nvSpPr>
         <p:spPr>
           <a:xfrm>
-            <a:off x="7342632" y="2615184"/>
-            <a:ext cx="301752" cy="237744"/>
+            <a:off x="6908292" y="2615184"/>
+            <a:ext cx="822960" cy="237744"/>
           </a:xfrm>
           <a:prstGeom prst="rect">
             <a:avLst/>
@@ -5310,13 +5310,13 @@
             <a:r>
               <a:rPr lang="en-US" sz="700" b="1" dirty="0">
                 <a:solidFill>
-                  <a:srgbClr val="FFFFFF"/>
-                </a:solidFill>
-                <a:latin typeface="Yu Gothic" pitchFamily="34" charset="0"/>
-                <a:ea typeface="Yu Gothic" pitchFamily="34" charset="-122"/>
-                <a:cs typeface="Yu Gothic" pitchFamily="34" charset="-120"/>
-              </a:rPr>
-              <a:t>入門</a:t>
+                  <a:srgbClr val="1C1B1B"/>
+                </a:solidFill>
+                <a:latin typeface="Yu Gothic" pitchFamily="34" charset="0"/>
+                <a:ea typeface="Yu Gothic" pitchFamily="34" charset="-122"/>
+                <a:cs typeface="Yu Gothic" pitchFamily="34" charset="-120"/>
+              </a:rPr>
+              <a:t>アクリルスタンド</a:t>
             </a:r>
             <a:endParaRPr lang="en-US" sz="700" dirty="0"/>
           </a:p>
@@ -5339,7 +5339,7 @@
             </a:avLst>
           </a:prstGeom>
           <a:solidFill>
-            <a:srgbClr val="D7FDF6"/>
+            <a:srgbClr val="DDF8F3"/>
           </a:solidFill>
           <a:ln w="19050">
             <a:solidFill>
@@ -5397,7 +5397,7 @@
         <p:spPr>
           <a:xfrm>
             <a:off x="6473952" y="3483864"/>
-            <a:ext cx="562356" cy="237744"/>
+            <a:ext cx="388620" cy="237744"/>
           </a:xfrm>
           <a:prstGeom prst="roundRect">
             <a:avLst>
@@ -5405,7 +5405,7 @@
             </a:avLst>
           </a:prstGeom>
           <a:solidFill>
-            <a:srgbClr val="1C1B1B"/>
+            <a:srgbClr val="CB9605"/>
           </a:solidFill>
           <a:ln w="15875">
             <a:solidFill>
@@ -5424,7 +5424,7 @@
         <p:spPr>
           <a:xfrm>
             <a:off x="6473952" y="3483864"/>
-            <a:ext cx="562356" cy="237744"/>
+            <a:ext cx="388620" cy="237744"/>
           </a:xfrm>
           <a:prstGeom prst="rect">
             <a:avLst/>
@@ -5442,13 +5442,13 @@
             <a:r>
               <a:rPr lang="en-US" sz="700" b="1" dirty="0">
                 <a:solidFill>
-                  <a:srgbClr val="FFFFFF"/>
-                </a:solidFill>
-                <a:latin typeface="Yu Gothic" pitchFamily="34" charset="0"/>
-                <a:ea typeface="Yu Gothic" pitchFamily="34" charset="-122"/>
-                <a:cs typeface="Yu Gothic" pitchFamily="34" charset="-120"/>
-              </a:rPr>
-              <a:t>リーダブル</a:t>
+                  <a:srgbClr val="1C1B1B"/>
+                </a:solidFill>
+                <a:latin typeface="Yu Gothic" pitchFamily="34" charset="0"/>
+                <a:ea typeface="Yu Gothic" pitchFamily="34" charset="-122"/>
+                <a:cs typeface="Yu Gothic" pitchFamily="34" charset="-120"/>
+              </a:rPr>
+              <a:t>五条悟</a:t>
             </a:r>
             <a:endParaRPr lang="en-US" sz="700" dirty="0"/>
           </a:p>
@@ -5462,8 +5462,8 @@
         </p:nvSpPr>
         <p:spPr>
           <a:xfrm>
-            <a:off x="7082028" y="3483864"/>
-            <a:ext cx="388620" cy="237744"/>
+            <a:off x="6908292" y="3483864"/>
+            <a:ext cx="475488" cy="237744"/>
           </a:xfrm>
           <a:prstGeom prst="roundRect">
             <a:avLst>
@@ -5471,7 +5471,7 @@
             </a:avLst>
           </a:prstGeom>
           <a:solidFill>
-            <a:srgbClr val="1C1B1B"/>
+            <a:srgbClr val="CB9605"/>
           </a:solidFill>
           <a:ln w="15875">
             <a:solidFill>
@@ -5489,8 +5489,8 @@
         </p:nvSpPr>
         <p:spPr>
           <a:xfrm>
-            <a:off x="7082028" y="3483864"/>
-            <a:ext cx="388620" cy="237744"/>
+            <a:off x="6908292" y="3483864"/>
+            <a:ext cx="475488" cy="237744"/>
           </a:xfrm>
           <a:prstGeom prst="rect">
             <a:avLst/>
@@ -5508,13 +5508,13 @@
             <a:r>
               <a:rPr lang="en-US" sz="700" b="1" dirty="0">
                 <a:solidFill>
-                  <a:srgbClr val="FFFFFF"/>
-                </a:solidFill>
-                <a:latin typeface="Yu Gothic" pitchFamily="34" charset="0"/>
-                <a:ea typeface="Yu Gothic" pitchFamily="34" charset="-122"/>
-                <a:cs typeface="Yu Gothic" pitchFamily="34" charset="-120"/>
-              </a:rPr>
-              <a:t>入門書</a:t>
+                  <a:srgbClr val="1C1B1B"/>
+                </a:solidFill>
+                <a:latin typeface="Yu Gothic" pitchFamily="34" charset="0"/>
+                <a:ea typeface="Yu Gothic" pitchFamily="34" charset="-122"/>
+                <a:cs typeface="Yu Gothic" pitchFamily="34" charset="-120"/>
+              </a:rPr>
+              <a:t>アクスタ</a:t>
             </a:r>
             <a:endParaRPr lang="en-US" sz="700" dirty="0"/>
           </a:p>
@@ -5553,7 +5553,7 @@
                 <a:ea typeface="Yu Gothic" pitchFamily="34" charset="-122"/>
                 <a:cs typeface="Yu Gothic" pitchFamily="34" charset="-120"/>
               </a:rPr>
-              <a:t>表記がちがっても同じ本として表示</a:t>
+              <a:t>表記がちがっても同じグッズとして表示</a:t>
             </a:r>
             <a:endParaRPr lang="en-US" sz="700" dirty="0"/>
           </a:p>
@@ -5632,7 +5632,7 @@
       </p:sp>
       <p:pic>
         <p:nvPicPr>
-          <p:cNvPr id="3" name="Image 0" descr="C:/Users/user/otaku-match/frontend/public/logo2.png">    </p:cNvPr>
+          <p:cNvPr id="3" name="Image 0" descr="C:/Users/user/otaku-match/frontend/public/logo.png">    </p:cNvPr>
           <p:cNvPicPr>
             <a:picLocks noChangeAspect="1"/>
           </p:cNvPicPr>
@@ -5719,7 +5719,7 @@
             <a:r>
               <a:rPr lang="en-US" sz="2400" b="1" dirty="0">
                 <a:solidFill>
-                  <a:srgbClr val="00705E"/>
+                  <a:srgbClr val="E43D81"/>
                 </a:solidFill>
                 <a:latin typeface="Yu Gothic" pitchFamily="34" charset="0"/>
                 <a:ea typeface="Yu Gothic" pitchFamily="34" charset="-122"/>
@@ -5747,7 +5747,7 @@
             <a:r>
               <a:rPr lang="en-US" sz="2400" b="1" dirty="0">
                 <a:solidFill>
-                  <a:srgbClr val="00705E"/>
+                  <a:srgbClr val="E43D81"/>
                 </a:solidFill>
                 <a:latin typeface="Yu Gothic" pitchFamily="34" charset="0"/>
                 <a:ea typeface="Yu Gothic" pitchFamily="34" charset="-122"/>
@@ -5973,7 +5973,7 @@
                 <a:ea typeface="Yu Gothic" pitchFamily="34" charset="-122"/>
                 <a:cs typeface="Yu Gothic" pitchFamily="34" charset="-120"/>
               </a:rPr>
-              <a:t>技術書特化型</a:t>
+              <a:t>推し活特化型</a:t>
             </a:r>
             <a:endParaRPr lang="en-US" sz="1100" dirty="0"/>
           </a:p>
@@ -6171,7 +6171,7 @@
                 <a:ea typeface="Yu Gothic" pitchFamily="34" charset="-122"/>
                 <a:cs typeface="Yu Gothic" pitchFamily="34" charset="-120"/>
               </a:rPr>
-              <a:t>技術書の古書店</a:t>
+              <a:t>交換掲示板</a:t>
             </a:r>
             <a:endParaRPr lang="en-US" sz="1000" dirty="0"/>
           </a:p>
@@ -6206,7 +6206,7 @@
       </p:sp>
       <p:pic>
         <p:nvPicPr>
-          <p:cNvPr id="19" name="Image 1" descr="C:/Users/user/otaku-match/frontend/public/logo2.png">    </p:cNvPr>
+          <p:cNvPr id="19" name="Image 1" descr="C:/Users/user/otaku-match/frontend/public/logo.png">    </p:cNvPr>
           <p:cNvPicPr>
             <a:picLocks noChangeAspect="1"/>
           </p:cNvPicPr>
@@ -6339,7 +6339,7 @@
       </p:sp>
       <p:pic>
         <p:nvPicPr>
-          <p:cNvPr id="3" name="Image 0" descr="C:/Users/user/otaku-match/frontend/public/logo2.png">    </p:cNvPr>
+          <p:cNvPr id="3" name="Image 0" descr="C:/Users/user/otaku-match/frontend/public/logo.png">    </p:cNvPr>
           <p:cNvPicPr>
             <a:picLocks noChangeAspect="1"/>
           </p:cNvPicPr>
@@ -6416,7 +6416,7 @@
             </a:avLst>
           </a:prstGeom>
           <a:solidFill>
-            <a:srgbClr val="F8FF3E"/>
+            <a:srgbClr val="E43D81"/>
           </a:solidFill>
           <a:ln w="25400">
             <a:solidFill>
@@ -6453,7 +6453,7 @@
             <a:r>
               <a:rPr lang="en-US" sz="1500" b="1" dirty="0">
                 <a:solidFill>
-                  <a:srgbClr val="1C1B1B"/>
+                  <a:srgbClr val="FFFFFF"/>
                 </a:solidFill>
                 <a:latin typeface="Yu Gothic" pitchFamily="34" charset="0"/>
                 <a:ea typeface="Yu Gothic" pitchFamily="34" charset="-122"/>
@@ -6515,7 +6515,7 @@
                 <a:ea typeface="Yu Gothic" pitchFamily="34" charset="-122"/>
                 <a:cs typeface="Yu Gothic" pitchFamily="34" charset="-120"/>
               </a:rPr>
-              <a:t>読み終えた技術書が</a:t>
+              <a:t>推しのグッズが</a:t>
             </a:r>
             <a:pPr algn="ctr" indent="0" marL="0">
               <a:buNone/>
@@ -6523,7 +6523,7 @@
             <a:r>
               <a:rPr lang="en-US" sz="3000" b="1" dirty="0">
                 <a:solidFill>
-                  <a:srgbClr val="00705E"/>
+                  <a:srgbClr val="E43D81"/>
                 </a:solidFill>
                 <a:latin typeface="Yu Gothic" pitchFamily="34" charset="0"/>
                 <a:ea typeface="Yu Gothic" pitchFamily="34" charset="-122"/>
@@ -6622,7 +6622,7 @@
       </p:sp>
       <p:pic>
         <p:nvPicPr>
-          <p:cNvPr id="3" name="Image 0" descr="C:/Users/user/otaku-match/frontend/public/logo2.png">    </p:cNvPr>
+          <p:cNvPr id="3" name="Image 0" descr="C:/Users/user/otaku-match/frontend/public/logo.png">    </p:cNvPr>
           <p:cNvPicPr>
             <a:picLocks noChangeAspect="1"/>
           </p:cNvPicPr>
@@ -6709,7 +6709,7 @@
             <a:r>
               <a:rPr lang="en-US" sz="2400" b="1" dirty="0">
                 <a:solidFill>
-                  <a:srgbClr val="00705E"/>
+                  <a:srgbClr val="E43D81"/>
                 </a:solidFill>
                 <a:latin typeface="Yu Gothic" pitchFamily="34" charset="0"/>
                 <a:ea typeface="Yu Gothic" pitchFamily="34" charset="-122"/>
@@ -6750,7 +6750,7 @@
             <a:avLst/>
           </a:prstGeom>
           <a:solidFill>
-            <a:srgbClr val="F8FF3E"/>
+            <a:srgbClr val="E43D81"/>
           </a:solidFill>
           <a:ln w="25400">
             <a:solidFill>
@@ -6916,7 +6916,7 @@
             <a:r>
               <a:rPr lang="en-US" sz="1200" b="1" dirty="0">
                 <a:solidFill>
-                  <a:srgbClr val="00705E"/>
+                  <a:srgbClr val="C62F6D"/>
                 </a:solidFill>
                 <a:latin typeface="Yu Gothic" pitchFamily="34" charset="0"/>
                 <a:ea typeface="Yu Gothic" pitchFamily="34" charset="-122"/>
@@ -7005,7 +7005,7 @@
             <a:avLst/>
           </a:prstGeom>
           <a:solidFill>
-            <a:srgbClr val="F8FF3E"/>
+            <a:srgbClr val="E43D81"/>
           </a:solidFill>
           <a:ln w="25400">
             <a:solidFill>
@@ -7132,7 +7132,7 @@
             <a:r>
               <a:rPr lang="en-US" sz="1200" b="1" dirty="0">
                 <a:solidFill>
-                  <a:srgbClr val="00705E"/>
+                  <a:srgbClr val="C62F6D"/>
                 </a:solidFill>
                 <a:latin typeface="Yu Gothic" pitchFamily="34" charset="0"/>
                 <a:ea typeface="Yu Gothic" pitchFamily="34" charset="-122"/>
@@ -7221,7 +7221,7 @@
             <a:avLst/>
           </a:prstGeom>
           <a:solidFill>
-            <a:srgbClr val="13F3CE"/>
+            <a:srgbClr val="00C2A8"/>
           </a:solidFill>
           <a:ln w="25400">
             <a:solidFill>
@@ -7348,7 +7348,7 @@
             <a:r>
               <a:rPr lang="en-US" sz="1200" b="1" dirty="0">
                 <a:solidFill>
-                  <a:srgbClr val="00705E"/>
+                  <a:srgbClr val="C62F6D"/>
                 </a:solidFill>
                 <a:latin typeface="Yu Gothic" pitchFamily="34" charset="0"/>
                 <a:ea typeface="Yu Gothic" pitchFamily="34" charset="-122"/>
@@ -7437,7 +7437,7 @@
             <a:avLst/>
           </a:prstGeom>
           <a:solidFill>
-            <a:srgbClr val="1C1B1B"/>
+            <a:srgbClr val="CB9605"/>
           </a:solidFill>
           <a:ln w="25400">
             <a:solidFill>
@@ -7544,7 +7544,7 @@
       </p:sp>
       <p:pic>
         <p:nvPicPr>
-          <p:cNvPr id="3" name="Image 0" descr="C:/Users/user/otaku-match/frontend/public/logo2.png">    </p:cNvPr>
+          <p:cNvPr id="3" name="Image 0" descr="C:/Users/user/otaku-match/frontend/public/logo.png">    </p:cNvPr>
           <p:cNvPicPr>
             <a:picLocks noChangeAspect="1"/>
           </p:cNvPicPr>
@@ -7645,7 +7645,7 @@
             <a:r>
               <a:rPr lang="en-US" sz="2400" b="1" dirty="0">
                 <a:solidFill>
-                  <a:srgbClr val="00705E"/>
+                  <a:srgbClr val="E43D81"/>
                 </a:solidFill>
                 <a:latin typeface="Yu Gothic" pitchFamily="34" charset="0"/>
                 <a:ea typeface="Yu Gothic" pitchFamily="34" charset="-122"/>
@@ -7684,7 +7684,7 @@
             <a:r>
               <a:rPr lang="en-US" sz="1300" b="1" dirty="0">
                 <a:solidFill>
-                  <a:srgbClr val="00705E"/>
+                  <a:srgbClr val="C62F6D"/>
                 </a:solidFill>
                 <a:latin typeface="Yu Gothic" pitchFamily="34" charset="0"/>
                 <a:ea typeface="Yu Gothic" pitchFamily="34" charset="-122"/>
@@ -7828,7 +7828,7 @@
             <a:r>
               <a:rPr lang="en-US" sz="6600" b="1" dirty="0">
                 <a:solidFill>
-                  <a:srgbClr val="00705E"/>
+                  <a:srgbClr val="E43D81"/>
                 </a:solidFill>
                 <a:latin typeface="Yu Gothic" pitchFamily="34" charset="0"/>
                 <a:ea typeface="Yu Gothic" pitchFamily="34" charset="-122"/>
@@ -7986,7 +7986,7 @@
             <a:r>
               <a:rPr lang="en-US" sz="6600" b="1" dirty="0">
                 <a:solidFill>
-                  <a:srgbClr val="00705E"/>
+                  <a:srgbClr val="00C2A8"/>
                 </a:solidFill>
                 <a:latin typeface="Yu Gothic" pitchFamily="34" charset="0"/>
                 <a:ea typeface="Yu Gothic" pitchFamily="34" charset="-122"/>
@@ -8108,7 +8108,7 @@
             <a:avLst/>
           </a:prstGeom>
           <a:solidFill>
-            <a:srgbClr val="F8FF3E"/>
+            <a:srgbClr val="E43D81"/>
           </a:solidFill>
           <a:ln w="19050">
             <a:solidFill>
@@ -8145,7 +8145,7 @@
             <a:r>
               <a:rPr lang="en-US" sz="1200" b="1" dirty="0">
                 <a:solidFill>
-                  <a:srgbClr val="1C1B1B"/>
+                  <a:srgbClr val="FFFFFF"/>
                 </a:solidFill>
                 <a:latin typeface="Yu Gothic" pitchFamily="34" charset="0"/>
                 <a:ea typeface="Yu Gothic" pitchFamily="34" charset="-122"/>
@@ -8256,7 +8256,7 @@
                 <a:ea typeface="Yu Gothic" pitchFamily="34" charset="-122"/>
                 <a:cs typeface="Yu Gothic" pitchFamily="34" charset="-120"/>
               </a:rPr>
-              <a:t>本の表紙の写真</a:t>
+              <a:t>アクスタの写真</a:t>
             </a:r>
             <a:endParaRPr lang="en-US" sz="900" dirty="0"/>
           </a:p>
@@ -8279,7 +8279,7 @@
             </a:avLst>
           </a:prstGeom>
           <a:solidFill>
-            <a:srgbClr val="ECEAE4"/>
+            <a:srgbClr val="FDF3DC"/>
           </a:solidFill>
           <a:ln w="15875">
             <a:solidFill>
@@ -8376,7 +8376,7 @@
         <p:spPr>
           <a:xfrm>
             <a:off x="6839712" y="3694176"/>
-            <a:ext cx="566928" cy="237744"/>
+            <a:ext cx="658368" cy="237744"/>
           </a:xfrm>
           <a:prstGeom prst="roundRect">
             <a:avLst>
@@ -8384,7 +8384,7 @@
             </a:avLst>
           </a:prstGeom>
           <a:solidFill>
-            <a:srgbClr val="FDFFD1"/>
+            <a:srgbClr val="FDE8F1"/>
           </a:solidFill>
           <a:ln w="15875">
             <a:solidFill>
@@ -8403,7 +8403,7 @@
         <p:spPr>
           <a:xfrm>
             <a:off x="6839712" y="3694176"/>
-            <a:ext cx="566928" cy="237744"/>
+            <a:ext cx="658368" cy="237744"/>
           </a:xfrm>
           <a:prstGeom prst="rect">
             <a:avLst/>
@@ -8427,7 +8427,7 @@
                 <a:ea typeface="Yu Gothic" pitchFamily="34" charset="-122"/>
                 <a:cs typeface="Yu Gothic" pitchFamily="34" charset="-120"/>
               </a:rPr>
-              <a:t>Rust</a:t>
+              <a:t>プロセカ</a:t>
             </a:r>
             <a:endParaRPr lang="en-US" sz="800" dirty="0"/>
           </a:p>
@@ -8441,8 +8441,8 @@
         </p:nvSpPr>
         <p:spPr>
           <a:xfrm>
-            <a:off x="7479792" y="3694176"/>
-            <a:ext cx="786384" cy="237744"/>
+            <a:off x="7571232" y="3694176"/>
+            <a:ext cx="566928" cy="237744"/>
           </a:xfrm>
           <a:prstGeom prst="roundRect">
             <a:avLst>
@@ -8450,7 +8450,7 @@
             </a:avLst>
           </a:prstGeom>
           <a:solidFill>
-            <a:srgbClr val="FDFFD1"/>
+            <a:srgbClr val="FDE8F1"/>
           </a:solidFill>
           <a:ln w="15875">
             <a:solidFill>
@@ -8468,8 +8468,8 @@
         </p:nvSpPr>
         <p:spPr>
           <a:xfrm>
-            <a:off x="7479792" y="3694176"/>
-            <a:ext cx="786384" cy="237744"/>
+            <a:off x="7571232" y="3694176"/>
+            <a:ext cx="566928" cy="237744"/>
           </a:xfrm>
           <a:prstGeom prst="rect">
             <a:avLst/>
@@ -8493,7 +8493,7 @@
                 <a:ea typeface="Yu Gothic" pitchFamily="34" charset="-122"/>
                 <a:cs typeface="Yu Gothic" pitchFamily="34" charset="-120"/>
               </a:rPr>
-              <a:t>オライリー</a:t>
+              <a:t>天馬司</a:t>
             </a:r>
             <a:endParaRPr lang="en-US" sz="800" dirty="0"/>
           </a:p>
@@ -8516,7 +8516,7 @@
             </a:avLst>
           </a:prstGeom>
           <a:solidFill>
-            <a:srgbClr val="FDFFD1"/>
+            <a:srgbClr val="FDE8F1"/>
           </a:solidFill>
           <a:ln w="15875">
             <a:solidFill>
@@ -8559,7 +8559,7 @@
                 <a:ea typeface="Yu Gothic" pitchFamily="34" charset="-122"/>
                 <a:cs typeface="Yu Gothic" pitchFamily="34" charset="-120"/>
               </a:rPr>
-              <a:t>入門書</a:t>
+              <a:t>アクスタ</a:t>
             </a:r>
             <a:endParaRPr lang="en-US" sz="800" dirty="0"/>
           </a:p>
@@ -8582,7 +8582,7 @@
             </a:avLst>
           </a:prstGeom>
           <a:solidFill>
-            <a:srgbClr val="F8FF3E"/>
+            <a:srgbClr val="E43D81"/>
           </a:solidFill>
           <a:ln w="19050">
             <a:solidFill>
@@ -8619,7 +8619,7 @@
             <a:r>
               <a:rPr lang="en-US" sz="900" b="1" dirty="0">
                 <a:solidFill>
-                  <a:srgbClr val="1C1B1B"/>
+                  <a:srgbClr val="FFFFFF"/>
                 </a:solidFill>
                 <a:latin typeface="Yu Gothic" pitchFamily="34" charset="0"/>
                 <a:ea typeface="Yu Gothic" pitchFamily="34" charset="-122"/>
@@ -8704,7 +8704,7 @@
       </p:sp>
       <p:pic>
         <p:nvPicPr>
-          <p:cNvPr id="3" name="Image 0" descr="C:/Users/user/otaku-match/frontend/public/logo2.png">    </p:cNvPr>
+          <p:cNvPr id="3" name="Image 0" descr="C:/Users/user/otaku-match/frontend/public/logo.png">    </p:cNvPr>
           <p:cNvPicPr>
             <a:picLocks noChangeAspect="1"/>
           </p:cNvPicPr>
@@ -8791,7 +8791,7 @@
             <a:r>
               <a:rPr lang="en-US" sz="2400" b="1" dirty="0">
                 <a:solidFill>
-                  <a:srgbClr val="00705E"/>
+                  <a:srgbClr val="E43D81"/>
                 </a:solidFill>
                 <a:latin typeface="Yu Gothic" pitchFamily="34" charset="0"/>
                 <a:ea typeface="Yu Gothic" pitchFamily="34" charset="-122"/>
@@ -8960,7 +8960,7 @@
             <a:avLst/>
           </a:prstGeom>
           <a:solidFill>
-            <a:srgbClr val="13F3CE"/>
+            <a:srgbClr val="00C2A8"/>
           </a:solidFill>
           <a:ln w="25400">
             <a:solidFill>
@@ -9176,7 +9176,7 @@
             <a:avLst/>
           </a:prstGeom>
           <a:solidFill>
-            <a:srgbClr val="F8FF3E"/>
+            <a:srgbClr val="E43D81"/>
           </a:solidFill>
           <a:ln w="25400">
             <a:solidFill>
@@ -9322,7 +9322,7 @@
       </p:sp>
       <p:pic>
         <p:nvPicPr>
-          <p:cNvPr id="3" name="Image 0" descr="C:/Users/user/otaku-match/frontend/public/logo2.png">    </p:cNvPr>
+          <p:cNvPr id="3" name="Image 0" descr="C:/Users/user/otaku-match/frontend/public/logo.png">    </p:cNvPr>
           <p:cNvPicPr>
             <a:picLocks noChangeAspect="1"/>
           </p:cNvPicPr>
@@ -9423,7 +9423,7 @@
             <a:r>
               <a:rPr lang="en-US" sz="2400" b="1" dirty="0">
                 <a:solidFill>
-                  <a:srgbClr val="00705E"/>
+                  <a:srgbClr val="E43D81"/>
                 </a:solidFill>
                 <a:latin typeface="Yu Gothic" pitchFamily="34" charset="0"/>
                 <a:ea typeface="Yu Gothic" pitchFamily="34" charset="-122"/>
@@ -9583,7 +9583,7 @@
             </a:avLst>
           </a:prstGeom>
           <a:solidFill>
-            <a:srgbClr val="FDFFD1"/>
+            <a:srgbClr val="FDE8F1"/>
           </a:solidFill>
           <a:ln w="22225">
             <a:solidFill>
@@ -9913,7 +9913,7 @@
             </a:avLst>
           </a:prstGeom>
           <a:solidFill>
-            <a:srgbClr val="D7FDF6"/>
+            <a:srgbClr val="DDF8F3"/>
           </a:solidFill>
           <a:ln w="22225">
             <a:solidFill>
@@ -10307,7 +10307,7 @@
             </a:avLst>
           </a:prstGeom>
           <a:solidFill>
-            <a:srgbClr val="ECEAE4"/>
+            <a:srgbClr val="FDF3DC"/>
           </a:solidFill>
           <a:ln w="25400">
             <a:solidFill>
@@ -10600,7 +10600,7 @@
       </p:sp>
       <p:pic>
         <p:nvPicPr>
-          <p:cNvPr id="3" name="Image 0" descr="C:/Users/user/otaku-match/frontend/public/logo2.png">    </p:cNvPr>
+          <p:cNvPr id="3" name="Image 0" descr="C:/Users/user/otaku-match/frontend/public/logo.png">    </p:cNvPr>
           <p:cNvPicPr>
             <a:picLocks noChangeAspect="1"/>
           </p:cNvPicPr>
@@ -10780,7 +10780,7 @@
             <a:avLst/>
           </a:prstGeom>
           <a:solidFill>
-            <a:srgbClr val="F8FF3E"/>
+            <a:srgbClr val="CB9605"/>
           </a:solidFill>
           <a:ln w="25400">
             <a:solidFill>
@@ -10957,7 +10957,7 @@
             <a:avLst/>
           </a:prstGeom>
           <a:solidFill>
-            <a:srgbClr val="13F3CE"/>
+            <a:srgbClr val="00C2A8"/>
           </a:solidFill>
           <a:ln w="25400">
             <a:solidFill>
@@ -11149,7 +11149,7 @@
             <a:avLst/>
           </a:prstGeom>
           <a:solidFill>
-            <a:srgbClr val="F8FF3E"/>
+            <a:srgbClr val="E43D81"/>
           </a:solidFill>
           <a:ln w="19050">
             <a:solidFill>
@@ -11186,7 +11186,7 @@
             <a:r>
               <a:rPr lang="en-US" sz="1200" b="1" dirty="0">
                 <a:solidFill>
-                  <a:srgbClr val="1C1B1B"/>
+                  <a:srgbClr val="FFFFFF"/>
                 </a:solidFill>
                 <a:latin typeface="Yu Gothic" pitchFamily="34" charset="0"/>
                 <a:ea typeface="Yu Gothic" pitchFamily="34" charset="-122"/>
@@ -11347,7 +11347,7 @@
             <a:r>
               <a:rPr lang="en-US" sz="2000" b="1" dirty="0">
                 <a:solidFill>
-                  <a:srgbClr val="00705E"/>
+                  <a:srgbClr val="CB9605"/>
                 </a:solidFill>
                 <a:latin typeface="Yu Gothic" pitchFamily="34" charset="0"/>
                 <a:ea typeface="Yu Gothic" pitchFamily="34" charset="-122"/>
@@ -11376,7 +11376,7 @@
             </a:avLst>
           </a:prstGeom>
           <a:solidFill>
-            <a:srgbClr val="F8FF3E"/>
+            <a:srgbClr val="E43D81"/>
           </a:solidFill>
           <a:ln w="19050">
             <a:solidFill>
@@ -11413,7 +11413,7 @@
             <a:r>
               <a:rPr lang="en-US" sz="900" b="1" dirty="0">
                 <a:solidFill>
-                  <a:srgbClr val="1C1B1B"/>
+                  <a:srgbClr val="FFFFFF"/>
                 </a:solidFill>
                 <a:latin typeface="Yu Gothic" pitchFamily="34" charset="0"/>
                 <a:ea typeface="Yu Gothic" pitchFamily="34" charset="-122"/>
@@ -11537,7 +11537,7 @@
       </p:sp>
       <p:pic>
         <p:nvPicPr>
-          <p:cNvPr id="3" name="Image 0" descr="C:/Users/user/otaku-match/frontend/public/logo2.png">    </p:cNvPr>
+          <p:cNvPr id="3" name="Image 0" descr="C:/Users/user/otaku-match/frontend/public/logo.png">    </p:cNvPr>
           <p:cNvPicPr>
             <a:picLocks noChangeAspect="1"/>
           </p:cNvPicPr>
@@ -11717,7 +11717,7 @@
             <a:avLst/>
           </a:prstGeom>
           <a:solidFill>
-            <a:srgbClr val="F8FF3E"/>
+            <a:srgbClr val="CB9605"/>
           </a:solidFill>
           <a:ln w="25400">
             <a:solidFill>
@@ -11894,7 +11894,7 @@
             <a:avLst/>
           </a:prstGeom>
           <a:solidFill>
-            <a:srgbClr val="13F3CE"/>
+            <a:srgbClr val="00C2A8"/>
           </a:solidFill>
           <a:ln w="25400">
             <a:solidFill>
@@ -12086,7 +12086,7 @@
             <a:avLst/>
           </a:prstGeom>
           <a:solidFill>
-            <a:srgbClr val="F8FF3E"/>
+            <a:srgbClr val="E43D81"/>
           </a:solidFill>
           <a:ln w="19050">
             <a:solidFill>
@@ -12123,7 +12123,7 @@
             <a:r>
               <a:rPr lang="en-US" sz="1200" b="1" dirty="0">
                 <a:solidFill>
-                  <a:srgbClr val="1C1B1B"/>
+                  <a:srgbClr val="FFFFFF"/>
                 </a:solidFill>
                 <a:latin typeface="Yu Gothic" pitchFamily="34" charset="0"/>
                 <a:ea typeface="Yu Gothic" pitchFamily="34" charset="-122"/>
@@ -12284,7 +12284,7 @@
             <a:r>
               <a:rPr lang="en-US" sz="2000" b="1" dirty="0">
                 <a:solidFill>
-                  <a:srgbClr val="00705E"/>
+                  <a:srgbClr val="CB9605"/>
                 </a:solidFill>
                 <a:latin typeface="Yu Gothic" pitchFamily="34" charset="0"/>
                 <a:ea typeface="Yu Gothic" pitchFamily="34" charset="-122"/>
@@ -12313,7 +12313,7 @@
             </a:avLst>
           </a:prstGeom>
           <a:solidFill>
-            <a:srgbClr val="F8FF3E"/>
+            <a:srgbClr val="E43D81"/>
           </a:solidFill>
           <a:ln w="19050">
             <a:solidFill>
@@ -12350,7 +12350,7 @@
             <a:r>
               <a:rPr lang="en-US" sz="900" b="1" dirty="0">
                 <a:solidFill>
-                  <a:srgbClr val="1C1B1B"/>
+                  <a:srgbClr val="FFFFFF"/>
                 </a:solidFill>
                 <a:latin typeface="Yu Gothic" pitchFamily="34" charset="0"/>
                 <a:ea typeface="Yu Gothic" pitchFamily="34" charset="-122"/>
@@ -12533,7 +12533,7 @@
             <a:r>
               <a:rPr lang="en-US" sz="3000" b="1" dirty="0">
                 <a:solidFill>
-                  <a:srgbClr val="00705E"/>
+                  <a:srgbClr val="E43D81"/>
                 </a:solidFill>
                 <a:latin typeface="Yu Gothic" pitchFamily="34" charset="0"/>
                 <a:ea typeface="Yu Gothic" pitchFamily="34" charset="-122"/>
@@ -12618,7 +12618,7 @@
       </p:sp>
       <p:pic>
         <p:nvPicPr>
-          <p:cNvPr id="3" name="Image 0" descr="C:/Users/user/otaku-match/frontend/public/logo2.png">    </p:cNvPr>
+          <p:cNvPr id="3" name="Image 0" descr="C:/Users/user/otaku-match/frontend/public/logo.png">    </p:cNvPr>
           <p:cNvPicPr>
             <a:picLocks noChangeAspect="1"/>
           </p:cNvPicPr>
@@ -12750,7 +12750,7 @@
                 <a:ea typeface="Yu Gothic" pitchFamily="34" charset="-122"/>
                 <a:cs typeface="Yu Gothic" pitchFamily="34" charset="-120"/>
               </a:rPr>
-              <a:t>技術書の</a:t>
+              <a:t>推し活の</a:t>
             </a:r>
             <a:pPr algn="ctr" indent="0" marL="0">
               <a:buNone/>
@@ -12758,7 +12758,7 @@
             <a:r>
               <a:rPr lang="en-US" sz="2200" b="1" dirty="0">
                 <a:solidFill>
-                  <a:srgbClr val="00705E"/>
+                  <a:srgbClr val="E43D81"/>
                 </a:solidFill>
                 <a:latin typeface="Yu Gothic" pitchFamily="34" charset="0"/>
                 <a:ea typeface="Yu Gothic" pitchFamily="34" charset="-122"/>
@@ -12865,7 +12865,7 @@
             <a:avLst/>
           </a:prstGeom>
           <a:solidFill>
-            <a:srgbClr val="F8FF3E"/>
+            <a:srgbClr val="E43D81"/>
           </a:solidFill>
           <a:ln w="25400">
             <a:solidFill>
@@ -12932,7 +12932,7 @@
                 <a:ea typeface="Yu Gothic" pitchFamily="34" charset="-122"/>
                 <a:cs typeface="Yu Gothic" pitchFamily="34" charset="-120"/>
               </a:rPr>
-              <a:t>読み終えた本が、次に必要な人へ届く</a:t>
+              <a:t>手放したグッズが、次の推しの人へ届く</a:t>
             </a:r>
             <a:endParaRPr lang="en-US" sz="1200" dirty="0"/>
           </a:p>
@@ -13019,7 +13019,7 @@
             <a:avLst/>
           </a:prstGeom>
           <a:solidFill>
-            <a:srgbClr val="13F3CE"/>
+            <a:srgbClr val="00C2A8"/>
           </a:solidFill>
           <a:ln w="25400">
             <a:solidFill>
@@ -13086,7 +13086,7 @@
                 <a:ea typeface="Yu Gothic" pitchFamily="34" charset="-122"/>
                 <a:cs typeface="Yu Gothic" pitchFamily="34" charset="-120"/>
               </a:rPr>
-              <a:t>勉強会や技術書典の外でも、交換の輪が回り続ける</a:t>
+              <a:t>イベント会場の外でも、交換の輪が回り続ける</a:t>
             </a:r>
             <a:endParaRPr lang="en-US" sz="1200" dirty="0"/>
           </a:p>
@@ -13157,7 +13157,7 @@
                 <a:ea typeface="Yu Gothic" pitchFamily="34" charset="-122"/>
                 <a:cs typeface="Yu Gothic" pitchFamily="34" charset="-120"/>
               </a:rPr>
-              <a:t>技術書交換の課題</a:t>
+              <a:t>推し活グッズ交換の課題</a:t>
             </a:r>
             <a:endParaRPr lang="en-US" sz="900" dirty="0"/>
           </a:p>
@@ -13165,7 +13165,7 @@
       </p:sp>
       <p:pic>
         <p:nvPicPr>
-          <p:cNvPr id="3" name="Image 0" descr="C:/Users/user/otaku-match/frontend/public/logo2.png">    </p:cNvPr>
+          <p:cNvPr id="3" name="Image 0" descr="C:/Users/user/otaku-match/frontend/public/logo.png">    </p:cNvPr>
           <p:cNvPicPr>
             <a:picLocks noChangeAspect="1"/>
           </p:cNvPicPr>
@@ -13258,7 +13258,7 @@
                 <a:ea typeface="Yu Gothic" pitchFamily="34" charset="-122"/>
                 <a:cs typeface="Yu Gothic" pitchFamily="34" charset="-120"/>
               </a:rPr>
-              <a:t>技術書の交換、</a:t>
+              <a:t>推し活のグッズ交換、</a:t>
             </a:r>
             <a:pPr algn="ctr" indent="0" marL="0">
               <a:buNone/>
@@ -13266,7 +13266,7 @@
             <a:r>
               <a:rPr lang="en-US" sz="2400" b="1" dirty="0">
                 <a:solidFill>
-                  <a:srgbClr val="00705E"/>
+                  <a:srgbClr val="E43D81"/>
                 </a:solidFill>
                 <a:latin typeface="Yu Gothic" pitchFamily="34" charset="0"/>
                 <a:ea typeface="Yu Gothic" pitchFamily="34" charset="-122"/>
@@ -13373,7 +13373,7 @@
             <a:avLst/>
           </a:prstGeom>
           <a:solidFill>
-            <a:srgbClr val="F8FF3E"/>
+            <a:srgbClr val="E43D81"/>
           </a:solidFill>
           <a:ln w="25400">
             <a:solidFill>
@@ -13550,7 +13550,7 @@
             <a:avLst/>
           </a:prstGeom>
           <a:solidFill>
-            <a:srgbClr val="1C1B1B"/>
+            <a:srgbClr val="CB9605"/>
           </a:solidFill>
           <a:ln w="25400">
             <a:solidFill>
@@ -13620,7 +13620,7 @@
                 <a:ea typeface="Yu Gothic" pitchFamily="34" charset="-122"/>
                 <a:cs typeface="Yu Gothic" pitchFamily="34" charset="-120"/>
               </a:rPr>
-              <a:t>見つけても、持っている本が</a:t>
+              <a:t>見つけても、持っているグッズが</a:t>
             </a:r>
             <a:endParaRPr lang="en-US" sz="1200" dirty="0"/>
           </a:p>
@@ -13640,7 +13640,7 @@
                 <a:ea typeface="Yu Gothic" pitchFamily="34" charset="-122"/>
                 <a:cs typeface="Yu Gothic" pitchFamily="34" charset="-120"/>
               </a:rPr>
-              <a:t>噛み合わず振り出しに戻る…</a:t>
+              <a:t>合わず振り出しに戻る…</a:t>
             </a:r>
             <a:endParaRPr lang="en-US" sz="1200" dirty="0"/>
           </a:p>
@@ -13727,7 +13727,7 @@
             <a:avLst/>
           </a:prstGeom>
           <a:solidFill>
-            <a:srgbClr val="13F3CE"/>
+            <a:srgbClr val="00C2A8"/>
           </a:solidFill>
           <a:ln w="25400">
             <a:solidFill>
@@ -13896,7 +13896,7 @@
       </p:sp>
       <p:pic>
         <p:nvPicPr>
-          <p:cNvPr id="3" name="Image 0" descr="C:/Users/user/otaku-match/frontend/public/logo2.png">    </p:cNvPr>
+          <p:cNvPr id="3" name="Image 0" descr="C:/Users/user/otaku-match/frontend/public/logo.png">    </p:cNvPr>
           <p:cNvPicPr>
             <a:picLocks noChangeAspect="1"/>
           </p:cNvPicPr>
@@ -13973,7 +13973,7 @@
             </a:avLst>
           </a:prstGeom>
           <a:solidFill>
-            <a:srgbClr val="F8FF3E"/>
+            <a:srgbClr val="E43D81"/>
           </a:solidFill>
           <a:ln w="25400">
             <a:solidFill>
@@ -14010,7 +14010,7 @@
             <a:r>
               <a:rPr lang="en-US" sz="1500" b="1" dirty="0">
                 <a:solidFill>
-                  <a:srgbClr val="1C1B1B"/>
+                  <a:srgbClr val="FFFFFF"/>
                 </a:solidFill>
                 <a:latin typeface="Yu Gothic" pitchFamily="34" charset="0"/>
                 <a:ea typeface="Yu Gothic" pitchFamily="34" charset="-122"/>
@@ -14094,7 +14094,7 @@
                 <a:ea typeface="Yu Gothic" pitchFamily="34" charset="-122"/>
                 <a:cs typeface="Yu Gothic" pitchFamily="34" charset="-120"/>
               </a:rPr>
-              <a:t>技術書の</a:t>
+              <a:t>推し活の</a:t>
             </a:r>
             <a:pPr algn="ctr" indent="0" marL="0">
               <a:buNone/>
@@ -14102,7 +14102,7 @@
             <a:r>
               <a:rPr lang="en-US" sz="4800" b="1" dirty="0">
                 <a:solidFill>
-                  <a:srgbClr val="00705E"/>
+                  <a:srgbClr val="E43D81"/>
                 </a:solidFill>
                 <a:latin typeface="Yu Gothic" pitchFamily="34" charset="0"/>
                 <a:ea typeface="Yu Gothic" pitchFamily="34" charset="-122"/>
@@ -14187,7 +14187,7 @@
       </p:sp>
       <p:pic>
         <p:nvPicPr>
-          <p:cNvPr id="3" name="Image 0" descr="C:/Users/user/otaku-match/frontend/public/logo2.png">    </p:cNvPr>
+          <p:cNvPr id="3" name="Image 0" descr="C:/Users/user/otaku-match/frontend/public/logo.png">    </p:cNvPr>
           <p:cNvPicPr>
             <a:picLocks noChangeAspect="1"/>
           </p:cNvPicPr>
@@ -14288,7 +14288,7 @@
             <a:r>
               <a:rPr lang="en-US" sz="2400" b="1" dirty="0">
                 <a:solidFill>
-                  <a:srgbClr val="00705E"/>
+                  <a:srgbClr val="E43D81"/>
                 </a:solidFill>
                 <a:latin typeface="Yu Gothic" pitchFamily="34" charset="0"/>
                 <a:ea typeface="Yu Gothic" pitchFamily="34" charset="-122"/>
@@ -14341,7 +14341,7 @@
             <a:r>
               <a:rPr lang="en-US" sz="1300" b="1" dirty="0">
                 <a:solidFill>
-                  <a:srgbClr val="00705E"/>
+                  <a:srgbClr val="C62F6D"/>
                 </a:solidFill>
                 <a:latin typeface="Yu Gothic" pitchFamily="34" charset="0"/>
                 <a:ea typeface="Yu Gothic" pitchFamily="34" charset="-122"/>
@@ -14407,7 +14407,7 @@
             <a:r>
               <a:rPr lang="en-US" sz="4400" b="1" dirty="0">
                 <a:solidFill>
-                  <a:srgbClr val="00705E"/>
+                  <a:srgbClr val="E43D81"/>
                 </a:solidFill>
                 <a:latin typeface="Yu Gothic" pitchFamily="34" charset="0"/>
                 <a:ea typeface="Yu Gothic" pitchFamily="34" charset="-122"/>
@@ -14574,7 +14574,7 @@
             <a:r>
               <a:rPr lang="en-US" sz="4400" b="1" dirty="0">
                 <a:solidFill>
-                  <a:srgbClr val="00705E"/>
+                  <a:srgbClr val="00C2A8"/>
                 </a:solidFill>
                 <a:latin typeface="Yu Gothic" pitchFamily="34" charset="0"/>
                 <a:ea typeface="Yu Gothic" pitchFamily="34" charset="-122"/>
@@ -14741,7 +14741,7 @@
             <a:r>
               <a:rPr lang="en-US" sz="4400" b="1" dirty="0">
                 <a:solidFill>
-                  <a:srgbClr val="1C1B1B"/>
+                  <a:srgbClr val="CB9605"/>
                 </a:solidFill>
                 <a:latin typeface="Yu Gothic" pitchFamily="34" charset="0"/>
                 <a:ea typeface="Yu Gothic" pitchFamily="34" charset="-122"/>
@@ -14901,11 +14901,11 @@
             <a:avLst/>
           </a:prstGeom>
           <a:solidFill>
-            <a:srgbClr val="F8FF3E"/>
+            <a:srgbClr val="E43D81"/>
           </a:solidFill>
           <a:ln w="12700">
             <a:solidFill>
-              <a:srgbClr val="F8FF3E"/>
+              <a:srgbClr val="E43D81"/>
             </a:solidFill>
             <a:prstDash val="solid"/>
           </a:ln>
@@ -14926,11 +14926,11 @@
             <a:avLst/>
           </a:prstGeom>
           <a:solidFill>
-            <a:srgbClr val="D7FDF6"/>
+            <a:srgbClr val="DDF8F3"/>
           </a:solidFill>
           <a:ln w="12700">
             <a:solidFill>
-              <a:srgbClr val="D7FDF6"/>
+              <a:srgbClr val="DDF8F3"/>
             </a:solidFill>
             <a:prstDash val="solid"/>
           </a:ln>
@@ -14965,7 +14965,7 @@
       </p:sp>
       <p:pic>
         <p:nvPicPr>
-          <p:cNvPr id="5" name="Image 0" descr="C:/Users/user/otaku-match/frontend/public/logo2.png">    </p:cNvPr>
+          <p:cNvPr id="5" name="Image 0" descr="C:/Users/user/otaku-match/frontend/public/logo.png">    </p:cNvPr>
           <p:cNvPicPr>
             <a:picLocks noChangeAspect="1"/>
           </p:cNvPicPr>
@@ -15069,7 +15069,7 @@
             <a:r>
               <a:rPr lang="en-US" sz="3200" b="1" dirty="0">
                 <a:solidFill>
-                  <a:srgbClr val="00705E"/>
+                  <a:srgbClr val="E43D81"/>
                 </a:solidFill>
                 <a:latin typeface="Yu Gothic" pitchFamily="34" charset="0"/>
                 <a:ea typeface="Yu Gothic" pitchFamily="34" charset="-122"/>
@@ -15128,7 +15128,7 @@
                 <a:ea typeface="Yu Gothic" pitchFamily="34" charset="-122"/>
                 <a:cs typeface="Yu Gothic" pitchFamily="34" charset="-120"/>
               </a:rPr>
-              <a:t>積ん読と探している本を、</a:t>
+              <a:t>推し活のグッズ交換を、</a:t>
             </a:r>
             <a:pPr indent="0" marL="0">
               <a:buNone/>
@@ -15136,7 +15136,7 @@
             <a:r>
               <a:rPr lang="en-US" sz="1300" b="1" dirty="0">
                 <a:solidFill>
-                  <a:srgbClr val="00705E"/>
+                  <a:srgbClr val="00997F"/>
                 </a:solidFill>
                 <a:latin typeface="Yu Gothic" pitchFamily="34" charset="0"/>
                 <a:ea typeface="Yu Gothic" pitchFamily="34" charset="-122"/>
@@ -15156,7 +15156,7 @@
                 <a:ea typeface="Yu Gothic" pitchFamily="34" charset="-122"/>
                 <a:cs typeface="Yu Gothic" pitchFamily="34" charset="-120"/>
               </a:rPr>
-              <a:t>とつなぐ</a:t>
+              <a:t>とつなぐマッチング</a:t>
             </a:r>
             <a:endParaRPr lang="en-US" sz="1300" dirty="0"/>
           </a:p>
@@ -15258,7 +15258,7 @@
             <a:avLst/>
           </a:prstGeom>
           <a:solidFill>
-            <a:srgbClr val="F8FF3E"/>
+            <a:srgbClr val="E43D81"/>
           </a:solidFill>
           <a:ln w="19050">
             <a:solidFill>
@@ -15295,7 +15295,7 @@
             <a:r>
               <a:rPr lang="en-US" sz="1200" b="1" dirty="0">
                 <a:solidFill>
-                  <a:srgbClr val="1C1B1B"/>
+                  <a:srgbClr val="FFFFFF"/>
                 </a:solidFill>
                 <a:latin typeface="Yu Gothic" pitchFamily="34" charset="0"/>
                 <a:ea typeface="Yu Gothic" pitchFamily="34" charset="-122"/>
@@ -15363,7 +15363,7 @@
             </a:avLst>
           </a:prstGeom>
           <a:solidFill>
-            <a:srgbClr val="D7FDF6"/>
+            <a:srgbClr val="DDF8F3"/>
           </a:solidFill>
           <a:ln w="19050">
             <a:solidFill>
@@ -15390,7 +15390,7 @@
             </a:avLst>
           </a:prstGeom>
           <a:solidFill>
-            <a:srgbClr val="F8FF3E"/>
+            <a:srgbClr val="E43D81"/>
           </a:solidFill>
           <a:ln w="15875">
             <a:solidFill>
@@ -15837,7 +15837,7 @@
             </a:avLst>
           </a:prstGeom>
           <a:solidFill>
-            <a:srgbClr val="F8FF3E"/>
+            <a:srgbClr val="E43D81"/>
           </a:solidFill>
           <a:ln w="15875">
             <a:solidFill>
@@ -15927,7 +15927,7 @@
             <a:r>
               <a:rPr lang="en-US" sz="1200" b="1" dirty="0">
                 <a:solidFill>
-                  <a:srgbClr val="00705E"/>
+                  <a:srgbClr val="C62F6D"/>
                 </a:solidFill>
                 <a:latin typeface="Yu Gothic" pitchFamily="34" charset="0"/>
                 <a:ea typeface="Yu Gothic" pitchFamily="34" charset="-122"/>
@@ -15987,7 +15987,7 @@
         <p:spPr>
           <a:xfrm>
             <a:off x="6199632" y="3300984"/>
-            <a:ext cx="566928" cy="237744"/>
+            <a:ext cx="658368" cy="237744"/>
           </a:xfrm>
           <a:prstGeom prst="roundRect">
             <a:avLst>
@@ -15995,7 +15995,7 @@
             </a:avLst>
           </a:prstGeom>
           <a:solidFill>
-            <a:srgbClr val="1C1B1B"/>
+            <a:srgbClr val="CB9605"/>
           </a:solidFill>
           <a:ln w="15875">
             <a:solidFill>
@@ -16014,7 +16014,7 @@
         <p:spPr>
           <a:xfrm>
             <a:off x="6199632" y="3300984"/>
-            <a:ext cx="566928" cy="237744"/>
+            <a:ext cx="658368" cy="237744"/>
           </a:xfrm>
           <a:prstGeom prst="rect">
             <a:avLst/>
@@ -16032,13 +16032,13 @@
             <a:r>
               <a:rPr lang="en-US" sz="800" b="1" dirty="0">
                 <a:solidFill>
-                  <a:srgbClr val="FFFFFF"/>
-                </a:solidFill>
-                <a:latin typeface="Yu Gothic" pitchFamily="34" charset="0"/>
-                <a:ea typeface="Yu Gothic" pitchFamily="34" charset="-122"/>
-                <a:cs typeface="Yu Gothic" pitchFamily="34" charset="-120"/>
-              </a:rPr>
-              <a:t>Rust</a:t>
+                  <a:srgbClr val="1C1B1B"/>
+                </a:solidFill>
+                <a:latin typeface="Yu Gothic" pitchFamily="34" charset="0"/>
+                <a:ea typeface="Yu Gothic" pitchFamily="34" charset="-122"/>
+                <a:cs typeface="Yu Gothic" pitchFamily="34" charset="-120"/>
+              </a:rPr>
+              <a:t>プロセカ</a:t>
             </a:r>
             <a:endParaRPr lang="en-US" sz="800" dirty="0"/>
           </a:p>
@@ -16052,8 +16052,8 @@
         </p:nvSpPr>
         <p:spPr>
           <a:xfrm>
-            <a:off x="6839712" y="3300984"/>
-            <a:ext cx="786384" cy="237744"/>
+            <a:off x="6931152" y="3300984"/>
+            <a:ext cx="566928" cy="237744"/>
           </a:xfrm>
           <a:prstGeom prst="roundRect">
             <a:avLst>
@@ -16061,7 +16061,7 @@
             </a:avLst>
           </a:prstGeom>
           <a:solidFill>
-            <a:srgbClr val="1C1B1B"/>
+            <a:srgbClr val="CB9605"/>
           </a:solidFill>
           <a:ln w="15875">
             <a:solidFill>
@@ -16079,8 +16079,8 @@
         </p:nvSpPr>
         <p:spPr>
           <a:xfrm>
-            <a:off x="6839712" y="3300984"/>
-            <a:ext cx="786384" cy="237744"/>
+            <a:off x="6931152" y="3300984"/>
+            <a:ext cx="566928" cy="237744"/>
           </a:xfrm>
           <a:prstGeom prst="rect">
             <a:avLst/>
@@ -16098,13 +16098,13 @@
             <a:r>
               <a:rPr lang="en-US" sz="800" b="1" dirty="0">
                 <a:solidFill>
-                  <a:srgbClr val="FFFFFF"/>
-                </a:solidFill>
-                <a:latin typeface="Yu Gothic" pitchFamily="34" charset="0"/>
-                <a:ea typeface="Yu Gothic" pitchFamily="34" charset="-122"/>
-                <a:cs typeface="Yu Gothic" pitchFamily="34" charset="-120"/>
-              </a:rPr>
-              <a:t>オライリー</a:t>
+                  <a:srgbClr val="1C1B1B"/>
+                </a:solidFill>
+                <a:latin typeface="Yu Gothic" pitchFamily="34" charset="0"/>
+                <a:ea typeface="Yu Gothic" pitchFamily="34" charset="-122"/>
+                <a:cs typeface="Yu Gothic" pitchFamily="34" charset="-120"/>
+              </a:rPr>
+              <a:t>天馬司</a:t>
             </a:r>
             <a:endParaRPr lang="en-US" sz="800" dirty="0"/>
           </a:p>
@@ -16127,7 +16127,7 @@
             </a:avLst>
           </a:prstGeom>
           <a:solidFill>
-            <a:srgbClr val="F8FF3E"/>
+            <a:srgbClr val="E43D81"/>
           </a:solidFill>
           <a:ln w="19050">
             <a:solidFill>
@@ -16164,7 +16164,7 @@
             <a:r>
               <a:rPr lang="en-US" sz="900" b="1" dirty="0">
                 <a:solidFill>
-                  <a:srgbClr val="1C1B1B"/>
+                  <a:srgbClr val="FFFFFF"/>
                 </a:solidFill>
                 <a:latin typeface="Yu Gothic" pitchFamily="34" charset="0"/>
                 <a:ea typeface="Yu Gothic" pitchFamily="34" charset="-122"/>
@@ -16241,7 +16241,7 @@
                 <a:ea typeface="Yu Gothic" pitchFamily="34" charset="-122"/>
                 <a:cs typeface="Yu Gothic" pitchFamily="34" charset="-120"/>
               </a:rPr>
-              <a:t>技術書交換の課題</a:t>
+              <a:t>推し活グッズ交換の課題</a:t>
             </a:r>
             <a:endParaRPr lang="en-US" sz="900" dirty="0"/>
           </a:p>
@@ -16249,7 +16249,7 @@
       </p:sp>
       <p:pic>
         <p:nvPicPr>
-          <p:cNvPr id="3" name="Image 0" descr="C:/Users/user/otaku-match/frontend/public/logo2.png">    </p:cNvPr>
+          <p:cNvPr id="3" name="Image 0" descr="C:/Users/user/otaku-match/frontend/public/logo.png">    </p:cNvPr>
           <p:cNvPicPr>
             <a:picLocks noChangeAspect="1"/>
           </p:cNvPicPr>
@@ -16342,7 +16342,7 @@
                 <a:ea typeface="Yu Gothic" pitchFamily="34" charset="-122"/>
                 <a:cs typeface="Yu Gothic" pitchFamily="34" charset="-120"/>
               </a:rPr>
-              <a:t>技術書の交換、</a:t>
+              <a:t>推し活のグッズ交換、</a:t>
             </a:r>
             <a:pPr algn="ctr" indent="0" marL="0">
               <a:buNone/>
@@ -16350,7 +16350,7 @@
             <a:r>
               <a:rPr lang="en-US" sz="2400" b="1" dirty="0">
                 <a:solidFill>
-                  <a:srgbClr val="00705E"/>
+                  <a:srgbClr val="E43D81"/>
                 </a:solidFill>
                 <a:latin typeface="Yu Gothic" pitchFamily="34" charset="0"/>
                 <a:ea typeface="Yu Gothic" pitchFamily="34" charset="-122"/>
@@ -16457,7 +16457,7 @@
             <a:avLst/>
           </a:prstGeom>
           <a:solidFill>
-            <a:srgbClr val="F8FF3E"/>
+            <a:srgbClr val="E43D81"/>
           </a:solidFill>
           <a:ln w="25400">
             <a:solidFill>
@@ -16634,7 +16634,7 @@
             <a:avLst/>
           </a:prstGeom>
           <a:solidFill>
-            <a:srgbClr val="1C1B1B"/>
+            <a:srgbClr val="CB9605"/>
           </a:solidFill>
           <a:ln w="25400">
             <a:solidFill>
@@ -16704,7 +16704,7 @@
                 <a:ea typeface="Yu Gothic" pitchFamily="34" charset="-122"/>
                 <a:cs typeface="Yu Gothic" pitchFamily="34" charset="-120"/>
               </a:rPr>
-              <a:t>見つけても、持っている本が</a:t>
+              <a:t>見つけても、持っているグッズが</a:t>
             </a:r>
             <a:endParaRPr lang="en-US" sz="1200" dirty="0"/>
           </a:p>
@@ -16724,7 +16724,7 @@
                 <a:ea typeface="Yu Gothic" pitchFamily="34" charset="-122"/>
                 <a:cs typeface="Yu Gothic" pitchFamily="34" charset="-120"/>
               </a:rPr>
-              <a:t>噛み合わず振り出しに戻る…</a:t>
+              <a:t>合わず振り出しに戻る…</a:t>
             </a:r>
             <a:endParaRPr lang="en-US" sz="1200" dirty="0"/>
           </a:p>
@@ -16811,7 +16811,7 @@
             <a:avLst/>
           </a:prstGeom>
           <a:solidFill>
-            <a:srgbClr val="13F3CE"/>
+            <a:srgbClr val="00C2A8"/>
           </a:solidFill>
           <a:ln w="25400">
             <a:solidFill>
@@ -17005,7 +17005,7 @@
             <a:r>
               <a:rPr lang="en-US" sz="3600" b="1" dirty="0">
                 <a:solidFill>
-                  <a:srgbClr val="00705E"/>
+                  <a:srgbClr val="E43D81"/>
                 </a:solidFill>
                 <a:latin typeface="Yu Gothic" pitchFamily="34" charset="0"/>
                 <a:ea typeface="Yu Gothic" pitchFamily="34" charset="-122"/>
@@ -17081,11 +17081,11 @@
             <a:avLst/>
           </a:prstGeom>
           <a:solidFill>
-            <a:srgbClr val="F8FF3E"/>
+            <a:srgbClr val="E43D81"/>
           </a:solidFill>
           <a:ln w="12700">
             <a:solidFill>
-              <a:srgbClr val="F8FF3E"/>
+              <a:srgbClr val="E43D81"/>
             </a:solidFill>
             <a:prstDash val="solid"/>
           </a:ln>
@@ -17106,11 +17106,11 @@
             <a:avLst/>
           </a:prstGeom>
           <a:solidFill>
-            <a:srgbClr val="D7FDF6"/>
+            <a:srgbClr val="DDF8F3"/>
           </a:solidFill>
           <a:ln w="12700">
             <a:solidFill>
-              <a:srgbClr val="D7FDF6"/>
+              <a:srgbClr val="DDF8F3"/>
             </a:solidFill>
             <a:prstDash val="solid"/>
           </a:ln>
@@ -17145,7 +17145,7 @@
       </p:sp>
       <p:pic>
         <p:nvPicPr>
-          <p:cNvPr id="5" name="Image 0" descr="C:/Users/user/otaku-match/frontend/public/logo2.png">    </p:cNvPr>
+          <p:cNvPr id="5" name="Image 0" descr="C:/Users/user/otaku-match/frontend/public/logo.png">    </p:cNvPr>
           <p:cNvPicPr>
             <a:picLocks noChangeAspect="1"/>
           </p:cNvPicPr>
@@ -17249,7 +17249,7 @@
             <a:r>
               <a:rPr lang="en-US" sz="3200" b="1" dirty="0">
                 <a:solidFill>
-                  <a:srgbClr val="00705E"/>
+                  <a:srgbClr val="E43D81"/>
                 </a:solidFill>
                 <a:latin typeface="Yu Gothic" pitchFamily="34" charset="0"/>
                 <a:ea typeface="Yu Gothic" pitchFamily="34" charset="-122"/>
@@ -17308,7 +17308,7 @@
                 <a:ea typeface="Yu Gothic" pitchFamily="34" charset="-122"/>
                 <a:cs typeface="Yu Gothic" pitchFamily="34" charset="-120"/>
               </a:rPr>
-              <a:t>積ん読と探している本を、</a:t>
+              <a:t>推し活のグッズ交換を、</a:t>
             </a:r>
             <a:pPr indent="0" marL="0">
               <a:buNone/>
@@ -17316,7 +17316,7 @@
             <a:r>
               <a:rPr lang="en-US" sz="1300" b="1" dirty="0">
                 <a:solidFill>
-                  <a:srgbClr val="00705E"/>
+                  <a:srgbClr val="00997F"/>
                 </a:solidFill>
                 <a:latin typeface="Yu Gothic" pitchFamily="34" charset="0"/>
                 <a:ea typeface="Yu Gothic" pitchFamily="34" charset="-122"/>
@@ -17336,7 +17336,7 @@
                 <a:ea typeface="Yu Gothic" pitchFamily="34" charset="-122"/>
                 <a:cs typeface="Yu Gothic" pitchFamily="34" charset="-120"/>
               </a:rPr>
-              <a:t>とつなぐ</a:t>
+              <a:t>とつなぐマッチング</a:t>
             </a:r>
             <a:endParaRPr lang="en-US" sz="1300" dirty="0"/>
           </a:p>
@@ -17438,7 +17438,7 @@
             <a:avLst/>
           </a:prstGeom>
           <a:solidFill>
-            <a:srgbClr val="F8FF3E"/>
+            <a:srgbClr val="E43D81"/>
           </a:solidFill>
           <a:ln w="19050">
             <a:solidFill>
@@ -17475,7 +17475,7 @@
             <a:r>
               <a:rPr lang="en-US" sz="1200" b="1" dirty="0">
                 <a:solidFill>
-                  <a:srgbClr val="1C1B1B"/>
+                  <a:srgbClr val="FFFFFF"/>
                 </a:solidFill>
                 <a:latin typeface="Yu Gothic" pitchFamily="34" charset="0"/>
                 <a:ea typeface="Yu Gothic" pitchFamily="34" charset="-122"/>
@@ -17543,7 +17543,7 @@
             </a:avLst>
           </a:prstGeom>
           <a:solidFill>
-            <a:srgbClr val="D7FDF6"/>
+            <a:srgbClr val="DDF8F3"/>
           </a:solidFill>
           <a:ln w="19050">
             <a:solidFill>
@@ -17570,7 +17570,7 @@
             </a:avLst>
           </a:prstGeom>
           <a:solidFill>
-            <a:srgbClr val="F8FF3E"/>
+            <a:srgbClr val="E43D81"/>
           </a:solidFill>
           <a:ln w="15875">
             <a:solidFill>
@@ -18017,7 +18017,7 @@
             </a:avLst>
           </a:prstGeom>
           <a:solidFill>
-            <a:srgbClr val="F8FF3E"/>
+            <a:srgbClr val="E43D81"/>
           </a:solidFill>
           <a:ln w="15875">
             <a:solidFill>
@@ -18107,7 +18107,7 @@
             <a:r>
               <a:rPr lang="en-US" sz="1200" b="1" dirty="0">
                 <a:solidFill>
-                  <a:srgbClr val="00705E"/>
+                  <a:srgbClr val="C62F6D"/>
                 </a:solidFill>
                 <a:latin typeface="Yu Gothic" pitchFamily="34" charset="0"/>
                 <a:ea typeface="Yu Gothic" pitchFamily="34" charset="-122"/>
@@ -18167,7 +18167,7 @@
         <p:spPr>
           <a:xfrm>
             <a:off x="6199632" y="3300984"/>
-            <a:ext cx="566928" cy="237744"/>
+            <a:ext cx="658368" cy="237744"/>
           </a:xfrm>
           <a:prstGeom prst="roundRect">
             <a:avLst>
@@ -18175,7 +18175,7 @@
             </a:avLst>
           </a:prstGeom>
           <a:solidFill>
-            <a:srgbClr val="1C1B1B"/>
+            <a:srgbClr val="CB9605"/>
           </a:solidFill>
           <a:ln w="15875">
             <a:solidFill>
@@ -18194,7 +18194,7 @@
         <p:spPr>
           <a:xfrm>
             <a:off x="6199632" y="3300984"/>
-            <a:ext cx="566928" cy="237744"/>
+            <a:ext cx="658368" cy="237744"/>
           </a:xfrm>
           <a:prstGeom prst="rect">
             <a:avLst/>
@@ -18212,13 +18212,13 @@
             <a:r>
               <a:rPr lang="en-US" sz="800" b="1" dirty="0">
                 <a:solidFill>
-                  <a:srgbClr val="FFFFFF"/>
-                </a:solidFill>
-                <a:latin typeface="Yu Gothic" pitchFamily="34" charset="0"/>
-                <a:ea typeface="Yu Gothic" pitchFamily="34" charset="-122"/>
-                <a:cs typeface="Yu Gothic" pitchFamily="34" charset="-120"/>
-              </a:rPr>
-              <a:t>Rust</a:t>
+                  <a:srgbClr val="1C1B1B"/>
+                </a:solidFill>
+                <a:latin typeface="Yu Gothic" pitchFamily="34" charset="0"/>
+                <a:ea typeface="Yu Gothic" pitchFamily="34" charset="-122"/>
+                <a:cs typeface="Yu Gothic" pitchFamily="34" charset="-120"/>
+              </a:rPr>
+              <a:t>プロセカ</a:t>
             </a:r>
             <a:endParaRPr lang="en-US" sz="800" dirty="0"/>
           </a:p>
@@ -18232,8 +18232,8 @@
         </p:nvSpPr>
         <p:spPr>
           <a:xfrm>
-            <a:off x="6839712" y="3300984"/>
-            <a:ext cx="786384" cy="237744"/>
+            <a:off x="6931152" y="3300984"/>
+            <a:ext cx="566928" cy="237744"/>
           </a:xfrm>
           <a:prstGeom prst="roundRect">
             <a:avLst>
@@ -18241,7 +18241,7 @@
             </a:avLst>
           </a:prstGeom>
           <a:solidFill>
-            <a:srgbClr val="1C1B1B"/>
+            <a:srgbClr val="CB9605"/>
           </a:solidFill>
           <a:ln w="15875">
             <a:solidFill>
@@ -18259,8 +18259,8 @@
         </p:nvSpPr>
         <p:spPr>
           <a:xfrm>
-            <a:off x="6839712" y="3300984"/>
-            <a:ext cx="786384" cy="237744"/>
+            <a:off x="6931152" y="3300984"/>
+            <a:ext cx="566928" cy="237744"/>
           </a:xfrm>
           <a:prstGeom prst="rect">
             <a:avLst/>
@@ -18278,13 +18278,13 @@
             <a:r>
               <a:rPr lang="en-US" sz="800" b="1" dirty="0">
                 <a:solidFill>
-                  <a:srgbClr val="FFFFFF"/>
-                </a:solidFill>
-                <a:latin typeface="Yu Gothic" pitchFamily="34" charset="0"/>
-                <a:ea typeface="Yu Gothic" pitchFamily="34" charset="-122"/>
-                <a:cs typeface="Yu Gothic" pitchFamily="34" charset="-120"/>
-              </a:rPr>
-              <a:t>オライリー</a:t>
+                  <a:srgbClr val="1C1B1B"/>
+                </a:solidFill>
+                <a:latin typeface="Yu Gothic" pitchFamily="34" charset="0"/>
+                <a:ea typeface="Yu Gothic" pitchFamily="34" charset="-122"/>
+                <a:cs typeface="Yu Gothic" pitchFamily="34" charset="-120"/>
+              </a:rPr>
+              <a:t>天馬司</a:t>
             </a:r>
             <a:endParaRPr lang="en-US" sz="800" dirty="0"/>
           </a:p>
@@ -18307,7 +18307,7 @@
             </a:avLst>
           </a:prstGeom>
           <a:solidFill>
-            <a:srgbClr val="F8FF3E"/>
+            <a:srgbClr val="E43D81"/>
           </a:solidFill>
           <a:ln w="19050">
             <a:solidFill>
@@ -18344,7 +18344,7 @@
             <a:r>
               <a:rPr lang="en-US" sz="900" b="1" dirty="0">
                 <a:solidFill>
-                  <a:srgbClr val="1C1B1B"/>
+                  <a:srgbClr val="FFFFFF"/>
                 </a:solidFill>
                 <a:latin typeface="Yu Gothic" pitchFamily="34" charset="0"/>
                 <a:ea typeface="Yu Gothic" pitchFamily="34" charset="-122"/>
@@ -18429,7 +18429,7 @@
       </p:sp>
       <p:pic>
         <p:nvPicPr>
-          <p:cNvPr id="3" name="Image 0" descr="C:/Users/user/otaku-match/frontend/public/logo2.png">    </p:cNvPr>
+          <p:cNvPr id="3" name="Image 0" descr="C:/Users/user/otaku-match/frontend/public/logo.png">    </p:cNvPr>
           <p:cNvPicPr>
             <a:picLocks noChangeAspect="1"/>
           </p:cNvPicPr>
@@ -18516,7 +18516,7 @@
             <a:r>
               <a:rPr lang="en-US" sz="2400" b="1" dirty="0">
                 <a:solidFill>
-                  <a:srgbClr val="00705E"/>
+                  <a:srgbClr val="E43D81"/>
                 </a:solidFill>
                 <a:latin typeface="Yu Gothic" pitchFamily="34" charset="0"/>
                 <a:ea typeface="Yu Gothic" pitchFamily="34" charset="-122"/>
@@ -18544,7 +18544,7 @@
             <a:r>
               <a:rPr lang="en-US" sz="2400" b="1" dirty="0">
                 <a:solidFill>
-                  <a:srgbClr val="00705E"/>
+                  <a:srgbClr val="E43D81"/>
                 </a:solidFill>
                 <a:latin typeface="Yu Gothic" pitchFamily="34" charset="0"/>
                 <a:ea typeface="Yu Gothic" pitchFamily="34" charset="-122"/>
@@ -18651,7 +18651,7 @@
             <a:avLst/>
           </a:prstGeom>
           <a:solidFill>
-            <a:srgbClr val="F8FF3E"/>
+            <a:srgbClr val="E43D81"/>
           </a:solidFill>
           <a:ln w="25400">
             <a:solidFill>
@@ -18765,7 +18765,7 @@
             </a:avLst>
           </a:prstGeom>
           <a:solidFill>
-            <a:srgbClr val="ECEAE4"/>
+            <a:srgbClr val="FDF3DC"/>
           </a:solidFill>
           <a:ln w="25400">
             <a:solidFill>
@@ -18790,7 +18790,7 @@
             <a:avLst/>
           </a:prstGeom>
           <a:solidFill>
-            <a:srgbClr val="1C1B1B"/>
+            <a:srgbClr val="CB9605"/>
           </a:solidFill>
           <a:ln w="25400">
             <a:solidFill>
@@ -18929,7 +18929,7 @@
             <a:avLst/>
           </a:prstGeom>
           <a:solidFill>
-            <a:srgbClr val="13F3CE"/>
+            <a:srgbClr val="00C2A8"/>
           </a:solidFill>
           <a:ln w="25400">
             <a:solidFill>
@@ -19098,7 +19098,7 @@
             <a:avLst/>
           </a:prstGeom>
           <a:solidFill>
-            <a:srgbClr val="F8FF3E"/>
+            <a:srgbClr val="E43D81"/>
           </a:solidFill>
           <a:ln w="19050">
             <a:solidFill>
@@ -19135,7 +19135,7 @@
             <a:r>
               <a:rPr lang="en-US" sz="1200" b="1" dirty="0">
                 <a:solidFill>
-                  <a:srgbClr val="1C1B1B"/>
+                  <a:srgbClr val="FFFFFF"/>
                 </a:solidFill>
                 <a:latin typeface="Yu Gothic" pitchFamily="34" charset="0"/>
                 <a:ea typeface="Yu Gothic" pitchFamily="34" charset="-122"/>
@@ -19164,7 +19164,7 @@
             </a:avLst>
           </a:prstGeom>
           <a:solidFill>
-            <a:srgbClr val="FDFFD1"/>
+            <a:srgbClr val="FDE8F1"/>
           </a:solidFill>
           <a:ln w="19050">
             <a:solidFill>
@@ -19273,7 +19273,7 @@
                 <a:ea typeface="Yu Gothic" pitchFamily="34" charset="-122"/>
                 <a:cs typeface="Yu Gothic" pitchFamily="34" charset="-120"/>
               </a:rPr>
-              <a:t>Rust</a:t>
+              <a:t>プロセカ</a:t>
             </a:r>
             <a:endParaRPr lang="en-US" sz="700" dirty="0"/>
           </a:p>
@@ -19288,7 +19288,7 @@
         <p:spPr>
           <a:xfrm>
             <a:off x="6995160" y="1911096"/>
-            <a:ext cx="562356" cy="237744"/>
+            <a:ext cx="388620" cy="237744"/>
           </a:xfrm>
           <a:prstGeom prst="roundRect">
             <a:avLst>
@@ -19315,7 +19315,7 @@
         <p:spPr>
           <a:xfrm>
             <a:off x="6995160" y="1911096"/>
-            <a:ext cx="562356" cy="237744"/>
+            <a:ext cx="388620" cy="237744"/>
           </a:xfrm>
           <a:prstGeom prst="rect">
             <a:avLst/>
@@ -19339,7 +19339,7 @@
                 <a:ea typeface="Yu Gothic" pitchFamily="34" charset="-122"/>
                 <a:cs typeface="Yu Gothic" pitchFamily="34" charset="-120"/>
               </a:rPr>
-              <a:t>オライリー</a:t>
+              <a:t>天馬司</a:t>
             </a:r>
             <a:endParaRPr lang="en-US" sz="700" dirty="0"/>
           </a:p>
@@ -19353,8 +19353,8 @@
         </p:nvSpPr>
         <p:spPr>
           <a:xfrm>
-            <a:off x="7603236" y="1911096"/>
-            <a:ext cx="388620" cy="237744"/>
+            <a:off x="7429500" y="1911096"/>
+            <a:ext cx="475488" cy="237744"/>
           </a:xfrm>
           <a:prstGeom prst="roundRect">
             <a:avLst>
@@ -19380,8 +19380,8 @@
         </p:nvSpPr>
         <p:spPr>
           <a:xfrm>
-            <a:off x="7603236" y="1911096"/>
-            <a:ext cx="388620" cy="237744"/>
+            <a:off x="7429500" y="1911096"/>
+            <a:ext cx="475488" cy="237744"/>
           </a:xfrm>
           <a:prstGeom prst="rect">
             <a:avLst/>
@@ -19405,7 +19405,7 @@
                 <a:ea typeface="Yu Gothic" pitchFamily="34" charset="-122"/>
                 <a:cs typeface="Yu Gothic" pitchFamily="34" charset="-120"/>
               </a:rPr>
-              <a:t>入門書</a:t>
+              <a:t>アクスタ</a:t>
             </a:r>
             <a:endParaRPr lang="en-US" sz="700" dirty="0"/>
           </a:p>
@@ -19428,7 +19428,7 @@
             </a:avLst>
           </a:prstGeom>
           <a:solidFill>
-            <a:srgbClr val="D7FDF6"/>
+            <a:srgbClr val="DDF8F3"/>
           </a:solidFill>
           <a:ln w="19050">
             <a:solidFill>
@@ -19537,7 +19537,7 @@
                 <a:ea typeface="Yu Gothic" pitchFamily="34" charset="-122"/>
                 <a:cs typeface="Yu Gothic" pitchFamily="34" charset="-120"/>
               </a:rPr>
-              <a:t>Rust</a:t>
+              <a:t>プロセカ</a:t>
             </a:r>
             <a:endParaRPr lang="en-US" sz="700" dirty="0"/>
           </a:p>
@@ -19552,7 +19552,7 @@
         <p:spPr>
           <a:xfrm>
             <a:off x="6995160" y="2752344"/>
-            <a:ext cx="562356" cy="237744"/>
+            <a:ext cx="388620" cy="237744"/>
           </a:xfrm>
           <a:prstGeom prst="roundRect">
             <a:avLst>
@@ -19579,7 +19579,7 @@
         <p:spPr>
           <a:xfrm>
             <a:off x="6995160" y="2752344"/>
-            <a:ext cx="562356" cy="237744"/>
+            <a:ext cx="388620" cy="237744"/>
           </a:xfrm>
           <a:prstGeom prst="rect">
             <a:avLst/>
@@ -19603,7 +19603,7 @@
                 <a:ea typeface="Yu Gothic" pitchFamily="34" charset="-122"/>
                 <a:cs typeface="Yu Gothic" pitchFamily="34" charset="-120"/>
               </a:rPr>
-              <a:t>オライリー</a:t>
+              <a:t>天馬司</a:t>
             </a:r>
             <a:endParaRPr lang="en-US" sz="700" dirty="0"/>
           </a:p>
@@ -19617,8 +19617,8 @@
         </p:nvSpPr>
         <p:spPr>
           <a:xfrm>
-            <a:off x="7603236" y="2752344"/>
-            <a:ext cx="388620" cy="237744"/>
+            <a:off x="7429500" y="2752344"/>
+            <a:ext cx="475488" cy="237744"/>
           </a:xfrm>
           <a:prstGeom prst="roundRect">
             <a:avLst>
@@ -19644,8 +19644,8 @@
         </p:nvSpPr>
         <p:spPr>
           <a:xfrm>
-            <a:off x="7603236" y="2752344"/>
-            <a:ext cx="388620" cy="237744"/>
+            <a:off x="7429500" y="2752344"/>
+            <a:ext cx="475488" cy="237744"/>
           </a:xfrm>
           <a:prstGeom prst="rect">
             <a:avLst/>
@@ -19669,7 +19669,7 @@
                 <a:ea typeface="Yu Gothic" pitchFamily="34" charset="-122"/>
                 <a:cs typeface="Yu Gothic" pitchFamily="34" charset="-120"/>
               </a:rPr>
-              <a:t>逆引き</a:t>
+              <a:t>缶バッジ</a:t>
             </a:r>
             <a:endParaRPr lang="en-US" sz="700" dirty="0"/>
           </a:p>
@@ -19692,7 +19692,7 @@
             </a:avLst>
           </a:prstGeom>
           <a:solidFill>
-            <a:srgbClr val="D7FDF6"/>
+            <a:srgbClr val="DDF8F3"/>
           </a:solidFill>
           <a:ln w="19050">
             <a:solidFill>
@@ -19750,7 +19750,7 @@
         <p:spPr>
           <a:xfrm>
             <a:off x="6473952" y="3593592"/>
-            <a:ext cx="301752" cy="237744"/>
+            <a:ext cx="475488" cy="237744"/>
           </a:xfrm>
           <a:prstGeom prst="roundRect">
             <a:avLst>
@@ -19777,7 +19777,7 @@
         <p:spPr>
           <a:xfrm>
             <a:off x="6473952" y="3593592"/>
-            <a:ext cx="301752" cy="237744"/>
+            <a:ext cx="475488" cy="237744"/>
           </a:xfrm>
           <a:prstGeom prst="rect">
             <a:avLst/>
@@ -19801,7 +19801,7 @@
                 <a:ea typeface="Yu Gothic" pitchFamily="34" charset="-122"/>
                 <a:cs typeface="Yu Gothic" pitchFamily="34" charset="-120"/>
               </a:rPr>
-              <a:t>Go</a:t>
+              <a:t>呪術廻戦</a:t>
             </a:r>
             <a:endParaRPr lang="en-US" sz="700" dirty="0"/>
           </a:p>
@@ -19815,8 +19815,8 @@
         </p:nvSpPr>
         <p:spPr>
           <a:xfrm>
-            <a:off x="6821424" y="3593592"/>
-            <a:ext cx="562356" cy="237744"/>
+            <a:off x="6995160" y="3593592"/>
+            <a:ext cx="388620" cy="237744"/>
           </a:xfrm>
           <a:prstGeom prst="roundRect">
             <a:avLst>
@@ -19842,8 +19842,8 @@
         </p:nvSpPr>
         <p:spPr>
           <a:xfrm>
-            <a:off x="6821424" y="3593592"/>
-            <a:ext cx="562356" cy="237744"/>
+            <a:off x="6995160" y="3593592"/>
+            <a:ext cx="388620" cy="237744"/>
           </a:xfrm>
           <a:prstGeom prst="rect">
             <a:avLst/>
@@ -19867,7 +19867,7 @@
                 <a:ea typeface="Yu Gothic" pitchFamily="34" charset="-122"/>
                 <a:cs typeface="Yu Gothic" pitchFamily="34" charset="-120"/>
               </a:rPr>
-              <a:t>達人出版会</a:t>
+              <a:t>五条悟</a:t>
             </a:r>
             <a:endParaRPr lang="en-US" sz="700" dirty="0"/>
           </a:p>
@@ -19933,7 +19933,7 @@
                 <a:ea typeface="Yu Gothic" pitchFamily="34" charset="-122"/>
                 <a:cs typeface="Yu Gothic" pitchFamily="34" charset="-120"/>
               </a:rPr>
-              <a:t>設計</a:t>
+              <a:t>ぬい</a:t>
             </a:r>
             <a:endParaRPr lang="en-US" sz="700" dirty="0"/>
           </a:p>
@@ -20012,7 +20012,7 @@
       </p:sp>
       <p:pic>
         <p:nvPicPr>
-          <p:cNvPr id="3" name="Image 0" descr="C:/Users/user/otaku-match/frontend/public/logo2.png">    </p:cNvPr>
+          <p:cNvPr id="3" name="Image 0" descr="C:/Users/user/otaku-match/frontend/public/logo.png">    </p:cNvPr>
           <p:cNvPicPr>
             <a:picLocks noChangeAspect="1"/>
           </p:cNvPicPr>
@@ -20113,7 +20113,7 @@
             <a:r>
               <a:rPr lang="en-US" sz="2400" b="1" dirty="0">
                 <a:solidFill>
-                  <a:srgbClr val="00705E"/>
+                  <a:srgbClr val="E43D81"/>
                 </a:solidFill>
                 <a:latin typeface="Yu Gothic" pitchFamily="34" charset="0"/>
                 <a:ea typeface="Yu Gothic" pitchFamily="34" charset="-122"/>
@@ -20247,7 +20247,7 @@
             </a:avLst>
           </a:prstGeom>
           <a:solidFill>
-            <a:srgbClr val="F8FF3E"/>
+            <a:srgbClr val="E43D81"/>
           </a:solidFill>
           <a:ln w="25400">
             <a:solidFill>
@@ -20284,7 +20284,7 @@
             <a:r>
               <a:rPr lang="en-US" sz="1100" b="1" dirty="0">
                 <a:solidFill>
-                  <a:srgbClr val="1C1B1B"/>
+                  <a:srgbClr val="FFFFFF"/>
                 </a:solidFill>
                 <a:latin typeface="Yu Gothic" pitchFamily="34" charset="0"/>
                 <a:ea typeface="Yu Gothic" pitchFamily="34" charset="-122"/>
@@ -20389,7 +20389,7 @@
             <a:r>
               <a:rPr lang="en-US" sz="1000" b="1" dirty="0">
                 <a:solidFill>
-                  <a:srgbClr val="00705E"/>
+                  <a:srgbClr val="00997F"/>
                 </a:solidFill>
                 <a:latin typeface="Yu Gothic" pitchFamily="34" charset="0"/>
                 <a:ea typeface="Yu Gothic" pitchFamily="34" charset="-122"/>
@@ -20418,7 +20418,7 @@
           <a:noFill/>
           <a:ln w="28575">
             <a:solidFill>
-              <a:srgbClr val="00705E"/>
+              <a:srgbClr val="00997F"/>
             </a:solidFill>
             <a:prstDash val="solid"/>
             <a:tailEnd type="triangle"/>
@@ -20554,7 +20554,7 @@
             </a:avLst>
           </a:prstGeom>
           <a:solidFill>
-            <a:srgbClr val="D7FDF6"/>
+            <a:srgbClr val="DDF8F3"/>
           </a:solidFill>
           <a:ln w="25400">
             <a:solidFill>
@@ -20591,7 +20591,7 @@
             <a:r>
               <a:rPr lang="en-US" sz="1200" b="1" dirty="0">
                 <a:solidFill>
-                  <a:srgbClr val="00705E"/>
+                  <a:srgbClr val="00997F"/>
                 </a:solidFill>
                 <a:latin typeface="Yu Gothic" pitchFamily="34" charset="0"/>
                 <a:ea typeface="Yu Gothic" pitchFamily="34" charset="-122"/>
@@ -20620,7 +20620,7 @@
             </a:avLst>
           </a:prstGeom>
           <a:solidFill>
-            <a:srgbClr val="F8FF3E"/>
+            <a:srgbClr val="E43D81"/>
           </a:solidFill>
           <a:ln w="25400">
             <a:solidFill>
@@ -20657,7 +20657,7 @@
             <a:r>
               <a:rPr lang="en-US" sz="1100" b="1" dirty="0">
                 <a:solidFill>
-                  <a:srgbClr val="1C1B1B"/>
+                  <a:srgbClr val="FFFFFF"/>
                 </a:solidFill>
                 <a:latin typeface="Yu Gothic" pitchFamily="34" charset="0"/>
                 <a:ea typeface="Yu Gothic" pitchFamily="34" charset="-122"/>
@@ -20985,7 +20985,7 @@
       </p:sp>
       <p:pic>
         <p:nvPicPr>
-          <p:cNvPr id="3" name="Image 0" descr="C:/Users/user/otaku-match/frontend/public/logo2.png">    </p:cNvPr>
+          <p:cNvPr id="3" name="Image 0" descr="C:/Users/user/otaku-match/frontend/public/logo.png">    </p:cNvPr>
           <p:cNvPicPr>
             <a:picLocks noChangeAspect="1"/>
           </p:cNvPicPr>
@@ -21086,7 +21086,7 @@
             <a:r>
               <a:rPr lang="en-US" sz="2400" b="1" dirty="0">
                 <a:solidFill>
-                  <a:srgbClr val="00705E"/>
+                  <a:srgbClr val="E43D81"/>
                 </a:solidFill>
                 <a:latin typeface="Yu Gothic" pitchFamily="34" charset="0"/>
                 <a:ea typeface="Yu Gothic" pitchFamily="34" charset="-122"/>
@@ -21139,7 +21139,7 @@
             <a:r>
               <a:rPr lang="en-US" sz="1300" b="1" dirty="0">
                 <a:solidFill>
-                  <a:srgbClr val="00705E"/>
+                  <a:srgbClr val="C62F6D"/>
                 </a:solidFill>
                 <a:latin typeface="Yu Gothic" pitchFamily="34" charset="0"/>
                 <a:ea typeface="Yu Gothic" pitchFamily="34" charset="-122"/>
@@ -21168,7 +21168,7 @@
             </a:avLst>
           </a:prstGeom>
           <a:solidFill>
-            <a:srgbClr val="D7FDF6"/>
+            <a:srgbClr val="DDF8F3"/>
           </a:solidFill>
           <a:ln w="25400">
             <a:solidFill>
@@ -21234,7 +21234,7 @@
             </a:avLst>
           </a:prstGeom>
           <a:solidFill>
-            <a:srgbClr val="F8FF3E"/>
+            <a:srgbClr val="E43D81"/>
           </a:solidFill>
           <a:ln w="22225">
             <a:solidFill>
@@ -21271,7 +21271,7 @@
             <a:r>
               <a:rPr lang="en-US" sz="1000" b="1" dirty="0">
                 <a:solidFill>
-                  <a:srgbClr val="1C1B1B"/>
+                  <a:srgbClr val="FFFFFF"/>
                 </a:solidFill>
                 <a:latin typeface="Yu Gothic" pitchFamily="34" charset="0"/>
                 <a:ea typeface="Yu Gothic" pitchFamily="34" charset="-122"/>
@@ -21300,7 +21300,7 @@
             </a:avLst>
           </a:prstGeom>
           <a:solidFill>
-            <a:srgbClr val="F8FF3E"/>
+            <a:srgbClr val="E43D81"/>
           </a:solidFill>
           <a:ln w="25400">
             <a:solidFill>
@@ -21337,7 +21337,7 @@
             <a:r>
               <a:rPr lang="en-US" sz="1100" b="1" dirty="0">
                 <a:solidFill>
-                  <a:srgbClr val="1C1B1B"/>
+                  <a:srgbClr val="FFFFFF"/>
                 </a:solidFill>
                 <a:latin typeface="Yu Gothic" pitchFamily="34" charset="0"/>
                 <a:ea typeface="Yu Gothic" pitchFamily="34" charset="-122"/>
@@ -21747,7 +21747,7 @@
             </a:avLst>
           </a:prstGeom>
           <a:solidFill>
-            <a:srgbClr val="F8FF3E"/>
+            <a:srgbClr val="E43D81"/>
           </a:solidFill>
           <a:ln w="25400">
             <a:solidFill>
@@ -21784,7 +21784,7 @@
             <a:r>
               <a:rPr lang="en-US" sz="1100" b="1" dirty="0">
                 <a:solidFill>
-                  <a:srgbClr val="1C1B1B"/>
+                  <a:srgbClr val="FFFFFF"/>
                 </a:solidFill>
                 <a:latin typeface="Yu Gothic" pitchFamily="34" charset="0"/>
                 <a:ea typeface="Yu Gothic" pitchFamily="34" charset="-122"/>
@@ -21860,7 +21860,7 @@
             <a:r>
               <a:rPr lang="en-US" sz="2200" b="1" dirty="0">
                 <a:solidFill>
-                  <a:srgbClr val="00705E"/>
+                  <a:srgbClr val="C62F6D"/>
                 </a:solidFill>
                 <a:latin typeface="Yu Gothic" pitchFamily="34" charset="0"/>
                 <a:ea typeface="Yu Gothic" pitchFamily="34" charset="-122"/>
@@ -22021,7 +22021,7 @@
             </a:avLst>
           </a:prstGeom>
           <a:solidFill>
-            <a:srgbClr val="F8FF3E"/>
+            <a:srgbClr val="E43D81"/>
           </a:solidFill>
           <a:ln w="25400">
             <a:solidFill>
@@ -22058,7 +22058,7 @@
             <a:r>
               <a:rPr lang="en-US" sz="1100" b="1" dirty="0">
                 <a:solidFill>
-                  <a:srgbClr val="1C1B1B"/>
+                  <a:srgbClr val="FFFFFF"/>
                 </a:solidFill>
                 <a:latin typeface="Yu Gothic" pitchFamily="34" charset="0"/>
                 <a:ea typeface="Yu Gothic" pitchFamily="34" charset="-122"/>
@@ -22468,7 +22468,7 @@
             </a:avLst>
           </a:prstGeom>
           <a:solidFill>
-            <a:srgbClr val="F8FF3E"/>
+            <a:srgbClr val="E43D81"/>
           </a:solidFill>
           <a:ln w="25400">
             <a:solidFill>
@@ -22505,7 +22505,7 @@
             <a:r>
               <a:rPr lang="en-US" sz="1100" b="1" dirty="0">
                 <a:solidFill>
-                  <a:srgbClr val="1C1B1B"/>
+                  <a:srgbClr val="FFFFFF"/>
                 </a:solidFill>
                 <a:latin typeface="Yu Gothic" pitchFamily="34" charset="0"/>
                 <a:ea typeface="Yu Gothic" pitchFamily="34" charset="-122"/>
@@ -22705,7 +22705,7 @@
       </p:sp>
       <p:pic>
         <p:nvPicPr>
-          <p:cNvPr id="3" name="Image 0" descr="C:/Users/user/otaku-match/frontend/public/logo2.png">    </p:cNvPr>
+          <p:cNvPr id="3" name="Image 0" descr="C:/Users/user/otaku-match/frontend/public/logo.png">    </p:cNvPr>
           <p:cNvPicPr>
             <a:picLocks noChangeAspect="1"/>
           </p:cNvPicPr>
@@ -22806,7 +22806,7 @@
             <a:r>
               <a:rPr lang="en-US" sz="2400" b="1" dirty="0">
                 <a:solidFill>
-                  <a:srgbClr val="00705E"/>
+                  <a:srgbClr val="E43D81"/>
                 </a:solidFill>
                 <a:latin typeface="Yu Gothic" pitchFamily="34" charset="0"/>
                 <a:ea typeface="Yu Gothic" pitchFamily="34" charset="-122"/>
@@ -23124,7 +23124,7 @@
                 <a:ea typeface="Yu Gothic" pitchFamily="34" charset="-122"/>
                 <a:cs typeface="Yu Gothic" pitchFamily="34" charset="-120"/>
               </a:rPr>
-              <a:t>【譲】リーダブルコード</a:t>
+              <a:t>【譲】天馬司 缶バッジ</a:t>
             </a:r>
             <a:endParaRPr lang="en-US" sz="800" dirty="0"/>
           </a:p>
@@ -23144,7 +23144,7 @@
                 <a:ea typeface="Yu Gothic" pitchFamily="34" charset="-122"/>
                 <a:cs typeface="Yu Gothic" pitchFamily="34" charset="-120"/>
               </a:rPr>
-              <a:t>【求】達人プログラマー</a:t>
+              <a:t>【求】草薙寧々 アクスタ</a:t>
             </a:r>
             <a:endParaRPr lang="en-US" sz="800" dirty="0"/>
           </a:p>
@@ -23211,7 +23211,7 @@
                 <a:ea typeface="Yu Gothic" pitchFamily="34" charset="-122"/>
                 <a:cs typeface="Yu Gothic" pitchFamily="34" charset="-120"/>
               </a:rPr>
-              <a:t>【求】Rust 入門書</a:t>
+              <a:t>【求】五条 アクスタ</a:t>
             </a:r>
             <a:endParaRPr lang="en-US" sz="800" dirty="0"/>
           </a:p>
@@ -23231,7 +23231,7 @@
                 <a:ea typeface="Yu Gothic" pitchFamily="34" charset="-122"/>
                 <a:cs typeface="Yu Gothic" pitchFamily="34" charset="-120"/>
               </a:rPr>
-              <a:t>【譲】Go 設計本</a:t>
+              <a:t>【譲】夏油 ぬい</a:t>
             </a:r>
             <a:endParaRPr lang="en-US" sz="800" dirty="0"/>
           </a:p>
@@ -23298,7 +23298,7 @@
                 <a:ea typeface="Yu Gothic" pitchFamily="34" charset="-122"/>
                 <a:cs typeface="Yu Gothic" pitchFamily="34" charset="-120"/>
               </a:rPr>
-              <a:t>【譲】技術書典の既刊 3冊</a:t>
+              <a:t>【譲】ランダム缶 5種</a:t>
             </a:r>
             <a:endParaRPr lang="en-US" sz="800" dirty="0"/>
           </a:p>
@@ -23318,7 +23318,7 @@
                 <a:ea typeface="Yu Gothic" pitchFamily="34" charset="-122"/>
                 <a:cs typeface="Yu Gothic" pitchFamily="34" charset="-120"/>
               </a:rPr>
-              <a:t>【求】同ジャンルの新刊</a:t>
+              <a:t>【求】同シリーズ 推し</a:t>
             </a:r>
             <a:endParaRPr lang="en-US" sz="800" dirty="0"/>
           </a:p>
@@ -23385,7 +23385,7 @@
                 <a:ea typeface="Yu Gothic" pitchFamily="34" charset="-122"/>
                 <a:cs typeface="Yu Gothic" pitchFamily="34" charset="-120"/>
               </a:rPr>
-              <a:t>【求】オライリーの機械学習本</a:t>
+              <a:t>【求】アクリルスタンド</a:t>
             </a:r>
             <a:endParaRPr lang="en-US" sz="800" dirty="0"/>
           </a:p>
@@ -23484,7 +23484,7 @@
       </p:sp>
       <p:pic>
         <p:nvPicPr>
-          <p:cNvPr id="3" name="Image 0" descr="C:/Users/user/otaku-match/frontend/public/logo2.png">    </p:cNvPr>
+          <p:cNvPr id="3" name="Image 0" descr="C:/Users/user/otaku-match/frontend/public/logo.png">    </p:cNvPr>
           <p:cNvPicPr>
             <a:picLocks noChangeAspect="1"/>
           </p:cNvPicPr>
@@ -23585,7 +23585,7 @@
             <a:r>
               <a:rPr lang="en-US" sz="2400" b="1" dirty="0">
                 <a:solidFill>
-                  <a:srgbClr val="00705E"/>
+                  <a:srgbClr val="E43D81"/>
                 </a:solidFill>
                 <a:latin typeface="Yu Gothic" pitchFamily="34" charset="0"/>
                 <a:ea typeface="Yu Gothic" pitchFamily="34" charset="-122"/>
@@ -23683,7 +23683,7 @@
                 <a:ea typeface="Yu Gothic" pitchFamily="34" charset="-122"/>
                 <a:cs typeface="Yu Gothic" pitchFamily="34" charset="-120"/>
               </a:rPr>
-              <a:t>本の表紙を撮る</a:t>
+              <a:t>グッズを撮る</a:t>
             </a:r>
             <a:endParaRPr lang="en-US" sz="1200" dirty="0"/>
           </a:p>
@@ -23731,7 +23731,7 @@
             <a:avLst/>
           </a:prstGeom>
           <a:solidFill>
-            <a:srgbClr val="F8FF3E"/>
+            <a:srgbClr val="E43D81"/>
           </a:solidFill>
           <a:ln w="25400">
             <a:solidFill>
@@ -23909,7 +23909,7 @@
             <a:avLst/>
           </a:prstGeom>
           <a:solidFill>
-            <a:srgbClr val="1C1B1B"/>
+            <a:srgbClr val="CB9605"/>
           </a:solidFill>
           <a:ln w="25400">
             <a:solidFill>
@@ -24104,7 +24104,7 @@
             <a:avLst/>
           </a:prstGeom>
           <a:solidFill>
-            <a:srgbClr val="13F3CE"/>
+            <a:srgbClr val="00C2A8"/>
           </a:solidFill>
           <a:ln w="25400">
             <a:solidFill>
